--- a/public/assets/APJ Abdul Kalam.pptx
+++ b/public/assets/APJ Abdul Kalam.pptx
@@ -17,8 +17,8 @@
     <p:sldId id="262" r:id="rId8"/>
     <p:sldId id="263" r:id="rId9"/>
     <p:sldId id="264" r:id="rId10"/>
-    <p:sldId id="265" r:id="rId11"/>
-    <p:sldId id="266" r:id="rId12"/>
+    <p:sldId id="270" r:id="rId11"/>
+    <p:sldId id="271" r:id="rId12"/>
     <p:sldId id="267" r:id="rId13"/>
     <p:sldId id="268" r:id="rId14"/>
     <p:sldId id="269" r:id="rId15"/>
@@ -255,7 +255,7 @@
           <a:p>
             <a:fld id="{B7268E1E-0E44-426D-905E-8AD9B19D2182}" type="datetimeFigureOut">
               <a:rPr lang="cs-CZ" smtClean="0"/>
-              <a:t>31.03.2026</a:t>
+              <a:t>02.04.2026</a:t>
             </a:fld>
             <a:endParaRPr lang="cs-CZ"/>
           </a:p>
@@ -792,6 +792,95 @@
 </p:notes>
 </file>
 
+<file path=ppt/notesSlides/notesSlide2.xml><?xml version="1.0" encoding="utf-8"?>
+<p:notes xmlns:a="http://schemas.openxmlformats.org/drawingml/2006/main" xmlns:r="http://schemas.openxmlformats.org/officeDocument/2006/relationships" xmlns:p="http://schemas.openxmlformats.org/presentationml/2006/main">
+  <p:cSld>
+    <p:spTree>
+      <p:nvGrpSpPr>
+        <p:cNvPr id="1" name=""/>
+        <p:cNvGrpSpPr/>
+        <p:nvPr/>
+      </p:nvGrpSpPr>
+      <p:grpSpPr>
+        <a:xfrm>
+          <a:off x="0" y="0"/>
+          <a:ext cx="0" cy="0"/>
+          <a:chOff x="0" y="0"/>
+          <a:chExt cx="0" cy="0"/>
+        </a:xfrm>
+      </p:grpSpPr>
+      <p:sp>
+        <p:nvSpPr>
+          <p:cNvPr id="2" name="Slide Image Placeholder 1"/>
+          <p:cNvSpPr>
+            <a:spLocks noGrp="1" noRot="1" noChangeAspect="1"/>
+          </p:cNvSpPr>
+          <p:nvPr>
+            <p:ph type="sldImg"/>
+          </p:nvPr>
+        </p:nvSpPr>
+        <p:spPr>
+          <a:xfrm>
+            <a:off x="2290763" y="512763"/>
+            <a:ext cx="4562475" cy="2566987"/>
+          </a:xfrm>
+        </p:spPr>
+      </p:sp>
+      <p:sp>
+        <p:nvSpPr>
+          <p:cNvPr id="3" name="Notes Placeholder 2"/>
+          <p:cNvSpPr>
+            <a:spLocks noGrp="1"/>
+          </p:cNvSpPr>
+          <p:nvPr>
+            <p:ph type="body" idx="1"/>
+          </p:nvPr>
+        </p:nvSpPr>
+        <p:spPr/>
+        <p:txBody>
+          <a:bodyPr/>
+          <a:lstStyle/>
+          <a:p>
+            <a:endParaRPr lang="en-US" dirty="0"/>
+          </a:p>
+        </p:txBody>
+      </p:sp>
+      <p:sp>
+        <p:nvSpPr>
+          <p:cNvPr id="4" name="Slide Number Placeholder 3"/>
+          <p:cNvSpPr>
+            <a:spLocks noGrp="1"/>
+          </p:cNvSpPr>
+          <p:nvPr>
+            <p:ph type="sldNum" sz="quarter" idx="5"/>
+          </p:nvPr>
+        </p:nvSpPr>
+        <p:spPr/>
+        <p:txBody>
+          <a:bodyPr/>
+          <a:lstStyle/>
+          <a:p>
+            <a:fld id="{871B2431-D351-4C6E-A3CF-9DFAC0E3E050}" type="slidenum">
+              <a:rPr lang="cs-CZ" smtClean="0"/>
+              <a:t>10</a:t>
+            </a:fld>
+            <a:endParaRPr lang="cs-CZ"/>
+          </a:p>
+        </p:txBody>
+      </p:sp>
+    </p:spTree>
+    <p:extLst>
+      <p:ext uri="{BB962C8B-B14F-4D97-AF65-F5344CB8AC3E}">
+        <p14:creationId xmlns:p14="http://schemas.microsoft.com/office/powerpoint/2010/main" val="3433141848"/>
+      </p:ext>
+    </p:extLst>
+  </p:cSld>
+  <p:clrMapOvr>
+    <a:masterClrMapping/>
+  </p:clrMapOvr>
+</p:notes>
+</file>
+
 <file path=ppt/slideLayouts/slideLayout1.xml><?xml version="1.0" encoding="utf-8"?>
 <p:sldLayout xmlns:a="http://schemas.openxmlformats.org/drawingml/2006/main" xmlns:r="http://schemas.openxmlformats.org/officeDocument/2006/relationships" xmlns:p="http://schemas.openxmlformats.org/presentationml/2006/main" type="title" preserve="1">
   <p:cSld name="Title Slide">
@@ -972,7 +1061,7 @@
             <a:fld id="{1D8BD707-D9CF-40AE-B4C6-C98DA3205C09}" type="datetimeFigureOut">
               <a:rPr lang="en-US" smtClean="0"/>
               <a:pPr/>
-              <a:t>31/03/2026</a:t>
+              <a:t>02/04/2026</a:t>
             </a:fld>
             <a:endParaRPr lang="en-US"/>
           </a:p>
@@ -1137,7 +1226,7 @@
             <a:fld id="{1D8BD707-D9CF-40AE-B4C6-C98DA3205C09}" type="datetimeFigureOut">
               <a:rPr lang="en-US" smtClean="0"/>
               <a:pPr/>
-              <a:t>31/03/2026</a:t>
+              <a:t>02/04/2026</a:t>
             </a:fld>
             <a:endParaRPr lang="en-US"/>
           </a:p>
@@ -1312,7 +1401,7 @@
             <a:fld id="{1D8BD707-D9CF-40AE-B4C6-C98DA3205C09}" type="datetimeFigureOut">
               <a:rPr lang="en-US" smtClean="0"/>
               <a:pPr/>
-              <a:t>31/03/2026</a:t>
+              <a:t>02/04/2026</a:t>
             </a:fld>
             <a:endParaRPr lang="en-US"/>
           </a:p>
@@ -1477,7 +1566,7 @@
             <a:fld id="{1D8BD707-D9CF-40AE-B4C6-C98DA3205C09}" type="datetimeFigureOut">
               <a:rPr lang="en-US" smtClean="0"/>
               <a:pPr/>
-              <a:t>31/03/2026</a:t>
+              <a:t>02/04/2026</a:t>
             </a:fld>
             <a:endParaRPr lang="en-US"/>
           </a:p>
@@ -1719,7 +1808,7 @@
             <a:fld id="{1D8BD707-D9CF-40AE-B4C6-C98DA3205C09}" type="datetimeFigureOut">
               <a:rPr lang="en-US" smtClean="0"/>
               <a:pPr/>
-              <a:t>31/03/2026</a:t>
+              <a:t>02/04/2026</a:t>
             </a:fld>
             <a:endParaRPr lang="en-US"/>
           </a:p>
@@ -2001,7 +2090,7 @@
             <a:fld id="{1D8BD707-D9CF-40AE-B4C6-C98DA3205C09}" type="datetimeFigureOut">
               <a:rPr lang="en-US" smtClean="0"/>
               <a:pPr/>
-              <a:t>31/03/2026</a:t>
+              <a:t>02/04/2026</a:t>
             </a:fld>
             <a:endParaRPr lang="en-US"/>
           </a:p>
@@ -2417,7 +2506,7 @@
             <a:fld id="{1D8BD707-D9CF-40AE-B4C6-C98DA3205C09}" type="datetimeFigureOut">
               <a:rPr lang="en-US" smtClean="0"/>
               <a:pPr/>
-              <a:t>31/03/2026</a:t>
+              <a:t>02/04/2026</a:t>
             </a:fld>
             <a:endParaRPr lang="en-US"/>
           </a:p>
@@ -2531,7 +2620,7 @@
             <a:fld id="{1D8BD707-D9CF-40AE-B4C6-C98DA3205C09}" type="datetimeFigureOut">
               <a:rPr lang="en-US" smtClean="0"/>
               <a:pPr/>
-              <a:t>31/03/2026</a:t>
+              <a:t>02/04/2026</a:t>
             </a:fld>
             <a:endParaRPr lang="en-US"/>
           </a:p>
@@ -2623,7 +2712,7 @@
             <a:fld id="{1D8BD707-D9CF-40AE-B4C6-C98DA3205C09}" type="datetimeFigureOut">
               <a:rPr lang="en-US" smtClean="0"/>
               <a:pPr/>
-              <a:t>31/03/2026</a:t>
+              <a:t>02/04/2026</a:t>
             </a:fld>
             <a:endParaRPr lang="en-US"/>
           </a:p>
@@ -2895,7 +2984,7 @@
             <a:fld id="{1D8BD707-D9CF-40AE-B4C6-C98DA3205C09}" type="datetimeFigureOut">
               <a:rPr lang="en-US" smtClean="0"/>
               <a:pPr/>
-              <a:t>31/03/2026</a:t>
+              <a:t>02/04/2026</a:t>
             </a:fld>
             <a:endParaRPr lang="en-US"/>
           </a:p>
@@ -3144,7 +3233,7 @@
             <a:fld id="{1D8BD707-D9CF-40AE-B4C6-C98DA3205C09}" type="datetimeFigureOut">
               <a:rPr lang="en-US" smtClean="0"/>
               <a:pPr/>
-              <a:t>31/03/2026</a:t>
+              <a:t>02/04/2026</a:t>
             </a:fld>
             <a:endParaRPr lang="en-US"/>
           </a:p>
@@ -3352,7 +3441,7 @@
             <a:fld id="{1D8BD707-D9CF-40AE-B4C6-C98DA3205C09}" type="datetimeFigureOut">
               <a:rPr lang="en-US" smtClean="0"/>
               <a:pPr/>
-              <a:t>31/03/2026</a:t>
+              <a:t>02/04/2026</a:t>
             </a:fld>
             <a:endParaRPr lang="en-US"/>
           </a:p>
@@ -4514,7 +4603,13 @@
     </p:bg>
     <p:spTree>
       <p:nvGrpSpPr>
-        <p:cNvPr id="1" name=""/>
+        <p:cNvPr id="1" name="">
+          <a:extLst>
+            <a:ext uri="{FF2B5EF4-FFF2-40B4-BE49-F238E27FC236}">
+              <a16:creationId xmlns:a16="http://schemas.microsoft.com/office/drawing/2014/main" id="{2F0DE02B-FB14-9A05-5494-082D1D4ED9D3}"/>
+            </a:ext>
+          </a:extLst>
+        </p:cNvPr>
         <p:cNvGrpSpPr/>
         <p:nvPr/>
       </p:nvGrpSpPr>
@@ -4528,7 +4623,13 @@
       </p:grpSpPr>
       <p:grpSp>
         <p:nvGrpSpPr>
-          <p:cNvPr id="2" name="Group 2"/>
+          <p:cNvPr id="2" name="Group 2">
+            <a:extLst>
+              <a:ext uri="{FF2B5EF4-FFF2-40B4-BE49-F238E27FC236}">
+                <a16:creationId xmlns:a16="http://schemas.microsoft.com/office/drawing/2014/main" id="{8AFC4D62-1E85-DE5A-A438-E6A898A87017}"/>
+              </a:ext>
+            </a:extLst>
+          </p:cNvPr>
           <p:cNvGrpSpPr/>
           <p:nvPr/>
         </p:nvGrpSpPr>
@@ -4542,7 +4643,13 @@
         </p:grpSpPr>
         <p:sp>
           <p:nvSpPr>
-            <p:cNvPr id="3" name="Freeform 3"/>
+            <p:cNvPr id="3" name="Freeform 3">
+              <a:extLst>
+                <a:ext uri="{FF2B5EF4-FFF2-40B4-BE49-F238E27FC236}">
+                  <a16:creationId xmlns:a16="http://schemas.microsoft.com/office/drawing/2014/main" id="{ABAF7C3C-E728-1AC2-46D8-CA83864EA622}"/>
+                </a:ext>
+              </a:extLst>
+            </p:cNvPr>
             <p:cNvSpPr/>
             <p:nvPr/>
           </p:nvSpPr>
@@ -4589,7 +4696,13 @@
         </p:sp>
         <p:sp>
           <p:nvSpPr>
-            <p:cNvPr id="4" name="TextBox 4"/>
+            <p:cNvPr id="4" name="TextBox 4">
+              <a:extLst>
+                <a:ext uri="{FF2B5EF4-FFF2-40B4-BE49-F238E27FC236}">
+                  <a16:creationId xmlns:a16="http://schemas.microsoft.com/office/drawing/2014/main" id="{874B12DE-ABE6-44CE-770B-BCC276879435}"/>
+                </a:ext>
+              </a:extLst>
+            </p:cNvPr>
             <p:cNvSpPr txBox="1"/>
             <p:nvPr/>
           </p:nvSpPr>
@@ -4618,7 +4731,13 @@
       </p:grpSp>
       <p:grpSp>
         <p:nvGrpSpPr>
-          <p:cNvPr id="5" name="Group 5"/>
+          <p:cNvPr id="5" name="Group 5">
+            <a:extLst>
+              <a:ext uri="{FF2B5EF4-FFF2-40B4-BE49-F238E27FC236}">
+                <a16:creationId xmlns:a16="http://schemas.microsoft.com/office/drawing/2014/main" id="{B4351DF9-7735-DB28-FFAD-70CF3619DF23}"/>
+              </a:ext>
+            </a:extLst>
+          </p:cNvPr>
           <p:cNvGrpSpPr/>
           <p:nvPr/>
         </p:nvGrpSpPr>
@@ -4632,7 +4751,13 @@
         </p:grpSpPr>
         <p:sp>
           <p:nvSpPr>
-            <p:cNvPr id="6" name="Freeform 6"/>
+            <p:cNvPr id="6" name="Freeform 6">
+              <a:extLst>
+                <a:ext uri="{FF2B5EF4-FFF2-40B4-BE49-F238E27FC236}">
+                  <a16:creationId xmlns:a16="http://schemas.microsoft.com/office/drawing/2014/main" id="{91A72B94-A807-393C-58D5-E6E44B7D6D83}"/>
+                </a:ext>
+              </a:extLst>
+            </p:cNvPr>
             <p:cNvSpPr/>
             <p:nvPr/>
           </p:nvSpPr>
@@ -4679,7 +4804,13 @@
         </p:sp>
         <p:sp>
           <p:nvSpPr>
-            <p:cNvPr id="7" name="TextBox 7"/>
+            <p:cNvPr id="7" name="TextBox 7">
+              <a:extLst>
+                <a:ext uri="{FF2B5EF4-FFF2-40B4-BE49-F238E27FC236}">
+                  <a16:creationId xmlns:a16="http://schemas.microsoft.com/office/drawing/2014/main" id="{B08B4118-5354-4455-C367-597DC986BADB}"/>
+                </a:ext>
+              </a:extLst>
+            </p:cNvPr>
             <p:cNvSpPr txBox="1"/>
             <p:nvPr/>
           </p:nvSpPr>
@@ -4708,26 +4839,32 @@
       </p:grpSp>
       <p:sp>
         <p:nvSpPr>
-          <p:cNvPr id="8" name="TextBox 8"/>
+          <p:cNvPr id="33" name="TextBox 8">
+            <a:extLst>
+              <a:ext uri="{FF2B5EF4-FFF2-40B4-BE49-F238E27FC236}">
+                <a16:creationId xmlns:a16="http://schemas.microsoft.com/office/drawing/2014/main" id="{6F4CB68B-5A72-F66A-68CE-DC5C2231BDFA}"/>
+              </a:ext>
+            </a:extLst>
+          </p:cNvPr>
           <p:cNvSpPr txBox="1"/>
           <p:nvPr/>
         </p:nvSpPr>
         <p:spPr>
           <a:xfrm>
-            <a:off x="2669239" y="1748170"/>
-            <a:ext cx="8852743" cy="1313181"/>
+            <a:off x="2026730" y="1077323"/>
+            <a:ext cx="14136881" cy="8132354"/>
           </a:xfrm>
           <a:prstGeom prst="rect">
             <a:avLst/>
           </a:prstGeom>
         </p:spPr>
         <p:txBody>
-          <a:bodyPr lIns="0" tIns="0" rIns="0" bIns="0" rtlCol="0" anchor="t">
+          <a:bodyPr wrap="square" lIns="0" tIns="0" rIns="0" bIns="0" rtlCol="0" anchor="t">
             <a:spAutoFit/>
           </a:bodyPr>
           <a:lstStyle/>
           <a:p>
-            <a:pPr algn="ctr">
+            <a:pPr>
               <a:lnSpc>
                 <a:spcPts val="5319"/>
               </a:lnSpc>
@@ -4736,7 +4873,7 @@
               </a:spcBef>
             </a:pPr>
             <a:r>
-              <a:rPr lang="en-US" sz="3799">
+              <a:rPr lang="en-US" sz="3799" dirty="0">
                 <a:solidFill>
                   <a:srgbClr val="FFDE59"/>
                 </a:solidFill>
@@ -4749,7 +4886,7 @@
             </a:r>
           </a:p>
           <a:p>
-            <a:pPr algn="ctr">
+            <a:pPr>
               <a:lnSpc>
                 <a:spcPts val="5319"/>
               </a:lnSpc>
@@ -4758,7 +4895,7 @@
               </a:spcBef>
             </a:pPr>
             <a:r>
-              <a:rPr lang="en-US" sz="3799">
+              <a:rPr lang="en-US" sz="3799" dirty="0">
                 <a:solidFill>
                   <a:srgbClr val="FFDE59"/>
                 </a:solidFill>
@@ -4767,123 +4904,35 @@
                 <a:cs typeface="Celandine"/>
                 <a:sym typeface="Celandine"/>
               </a:rPr>
-              <a:t>→ Avul Pakir Jainulabdeen Abdul Kalam</a:t>
-            </a:r>
-          </a:p>
-        </p:txBody>
-      </p:sp>
-      <p:grpSp>
-        <p:nvGrpSpPr>
-          <p:cNvPr id="9" name="Group 9"/>
-          <p:cNvGrpSpPr/>
-          <p:nvPr/>
-        </p:nvGrpSpPr>
-        <p:grpSpPr>
-          <a:xfrm>
-            <a:off x="2669239" y="2431854"/>
-            <a:ext cx="8852743" cy="1114639"/>
-            <a:chOff x="0" y="0"/>
-            <a:chExt cx="2331587" cy="293567"/>
-          </a:xfrm>
-        </p:grpSpPr>
-        <p:sp>
-          <p:nvSpPr>
-            <p:cNvPr id="10" name="Freeform 10"/>
-            <p:cNvSpPr/>
-            <p:nvPr/>
-          </p:nvSpPr>
-          <p:spPr>
-            <a:xfrm>
-              <a:off x="0" y="0"/>
-              <a:ext cx="2331587" cy="293567"/>
-            </a:xfrm>
-            <a:custGeom>
-              <a:avLst/>
-              <a:gdLst/>
-              <a:ahLst/>
-              <a:cxnLst/>
-              <a:rect l="l" t="t" r="r" b="b"/>
-              <a:pathLst>
-                <a:path w="2331587" h="293567">
-                  <a:moveTo>
-                    <a:pt x="0" y="0"/>
-                  </a:moveTo>
-                  <a:lnTo>
-                    <a:pt x="2331587" y="0"/>
-                  </a:lnTo>
-                  <a:lnTo>
-                    <a:pt x="2331587" y="293567"/>
-                  </a:lnTo>
-                  <a:lnTo>
-                    <a:pt x="0" y="293567"/>
-                  </a:lnTo>
-                  <a:close/>
-                </a:path>
-              </a:pathLst>
-            </a:custGeom>
-            <a:solidFill>
-              <a:srgbClr val="6766E0"/>
-            </a:solidFill>
-          </p:spPr>
-          <p:txBody>
-            <a:bodyPr/>
-            <a:lstStyle/>
-            <a:p>
-              <a:endParaRPr lang="en-US"/>
-            </a:p>
-          </p:txBody>
-        </p:sp>
-        <p:sp>
-          <p:nvSpPr>
-            <p:cNvPr id="11" name="TextBox 11"/>
-            <p:cNvSpPr txBox="1"/>
-            <p:nvPr/>
-          </p:nvSpPr>
-          <p:spPr>
-            <a:xfrm>
-              <a:off x="0" y="-38100"/>
-              <a:ext cx="2331587" cy="331667"/>
-            </a:xfrm>
-            <a:prstGeom prst="rect">
-              <a:avLst/>
-            </a:prstGeom>
-          </p:spPr>
-          <p:txBody>
-            <a:bodyPr lIns="50800" tIns="50800" rIns="50800" bIns="50800" rtlCol="0" anchor="ctr"/>
-            <a:lstStyle/>
-            <a:p>
-              <a:pPr algn="ctr">
-                <a:lnSpc>
-                  <a:spcPts val="2659"/>
-                </a:lnSpc>
-              </a:pPr>
-              <a:endParaRPr/>
-            </a:p>
-          </p:txBody>
-        </p:sp>
-      </p:grpSp>
-      <p:sp>
-        <p:nvSpPr>
-          <p:cNvPr id="12" name="TextBox 12"/>
-          <p:cNvSpPr txBox="1"/>
-          <p:nvPr/>
-        </p:nvSpPr>
-        <p:spPr>
-          <a:xfrm>
-            <a:off x="4025234" y="3166127"/>
-            <a:ext cx="7832080" cy="1313181"/>
-          </a:xfrm>
-          <a:prstGeom prst="rect">
-            <a:avLst/>
-          </a:prstGeom>
-        </p:spPr>
-        <p:txBody>
-          <a:bodyPr lIns="0" tIns="0" rIns="0" bIns="0" rtlCol="0" anchor="t">
-            <a:spAutoFit/>
-          </a:bodyPr>
-          <a:lstStyle/>
-          <a:p>
-            <a:pPr algn="ctr">
+              <a:t>→ </a:t>
+            </a:r>
+            <a:r>
+              <a:rPr lang="en-US" sz="3799" dirty="0" err="1">
+                <a:solidFill>
+                  <a:srgbClr val="FFDE59"/>
+                </a:solidFill>
+                <a:latin typeface="Celandine"/>
+                <a:ea typeface="Celandine"/>
+                <a:cs typeface="Celandine"/>
+                <a:sym typeface="Celandine"/>
+              </a:rPr>
+              <a:t>Avul</a:t>
+            </a:r>
+            <a:r>
+              <a:rPr lang="en-US" sz="3799" dirty="0">
+                <a:solidFill>
+                  <a:srgbClr val="FFDE59"/>
+                </a:solidFill>
+                <a:latin typeface="Celandine"/>
+                <a:ea typeface="Celandine"/>
+                <a:cs typeface="Celandine"/>
+                <a:sym typeface="Celandine"/>
+              </a:rPr>
+              <a:t> Pakir Jainulabdeen Abdul Kalam</a:t>
+            </a:r>
+          </a:p>
+          <a:p>
+            <a:pPr>
               <a:lnSpc>
                 <a:spcPts val="5319"/>
               </a:lnSpc>
@@ -4892,7 +4941,7 @@
               </a:spcBef>
             </a:pPr>
             <a:r>
-              <a:rPr lang="en-US" sz="3799">
+              <a:rPr lang="en-US" sz="3799" dirty="0">
                 <a:solidFill>
                   <a:srgbClr val="FFDE59"/>
                 </a:solidFill>
@@ -4905,7 +4954,7 @@
             </a:r>
           </a:p>
           <a:p>
-            <a:pPr algn="ctr">
+            <a:pPr>
               <a:lnSpc>
                 <a:spcPts val="5319"/>
               </a:lnSpc>
@@ -4914,7 +4963,7 @@
               </a:spcBef>
             </a:pPr>
             <a:r>
-              <a:rPr lang="en-US" sz="3799">
+              <a:rPr lang="en-US" sz="3799" dirty="0">
                 <a:solidFill>
                   <a:srgbClr val="FFDE59"/>
                 </a:solidFill>
@@ -4923,123 +4972,32 @@
                 <a:cs typeface="Celandine"/>
                 <a:sym typeface="Celandine"/>
               </a:rPr>
-              <a:t>→ 11th</a:t>
-            </a:r>
-          </a:p>
-        </p:txBody>
-      </p:sp>
-      <p:grpSp>
-        <p:nvGrpSpPr>
-          <p:cNvPr id="13" name="Group 13"/>
-          <p:cNvGrpSpPr/>
-          <p:nvPr/>
-        </p:nvGrpSpPr>
-        <p:grpSpPr>
-          <a:xfrm>
-            <a:off x="6955254" y="3860817"/>
-            <a:ext cx="2048390" cy="967151"/>
-            <a:chOff x="0" y="0"/>
-            <a:chExt cx="539494" cy="254723"/>
-          </a:xfrm>
-        </p:grpSpPr>
-        <p:sp>
-          <p:nvSpPr>
-            <p:cNvPr id="14" name="Freeform 14"/>
-            <p:cNvSpPr/>
-            <p:nvPr/>
-          </p:nvSpPr>
-          <p:spPr>
-            <a:xfrm>
-              <a:off x="0" y="0"/>
-              <a:ext cx="539494" cy="254723"/>
-            </a:xfrm>
-            <a:custGeom>
-              <a:avLst/>
-              <a:gdLst/>
-              <a:ahLst/>
-              <a:cxnLst/>
-              <a:rect l="l" t="t" r="r" b="b"/>
-              <a:pathLst>
-                <a:path w="539494" h="254723">
-                  <a:moveTo>
-                    <a:pt x="0" y="0"/>
-                  </a:moveTo>
-                  <a:lnTo>
-                    <a:pt x="539494" y="0"/>
-                  </a:lnTo>
-                  <a:lnTo>
-                    <a:pt x="539494" y="254723"/>
-                  </a:lnTo>
-                  <a:lnTo>
-                    <a:pt x="0" y="254723"/>
-                  </a:lnTo>
-                  <a:close/>
-                </a:path>
-              </a:pathLst>
-            </a:custGeom>
-            <a:solidFill>
-              <a:srgbClr val="6766E0"/>
-            </a:solidFill>
-          </p:spPr>
-          <p:txBody>
-            <a:bodyPr/>
-            <a:lstStyle/>
-            <a:p>
-              <a:endParaRPr lang="en-US"/>
-            </a:p>
-          </p:txBody>
-        </p:sp>
-        <p:sp>
-          <p:nvSpPr>
-            <p:cNvPr id="15" name="TextBox 15"/>
-            <p:cNvSpPr txBox="1"/>
-            <p:nvPr/>
-          </p:nvSpPr>
-          <p:spPr>
-            <a:xfrm>
-              <a:off x="0" y="-38100"/>
-              <a:ext cx="539494" cy="292823"/>
-            </a:xfrm>
-            <a:prstGeom prst="rect">
-              <a:avLst/>
-            </a:prstGeom>
-          </p:spPr>
-          <p:txBody>
-            <a:bodyPr lIns="50800" tIns="50800" rIns="50800" bIns="50800" rtlCol="0" anchor="ctr"/>
-            <a:lstStyle/>
-            <a:p>
-              <a:pPr algn="ctr">
-                <a:lnSpc>
-                  <a:spcPts val="2659"/>
-                </a:lnSpc>
-              </a:pPr>
-              <a:endParaRPr/>
-            </a:p>
-          </p:txBody>
-        </p:sp>
-      </p:grpSp>
-      <p:sp>
-        <p:nvSpPr>
-          <p:cNvPr id="16" name="TextBox 16"/>
-          <p:cNvSpPr txBox="1"/>
-          <p:nvPr/>
-        </p:nvSpPr>
-        <p:spPr>
-          <a:xfrm>
-            <a:off x="3586545" y="4584083"/>
-            <a:ext cx="12574309" cy="1313181"/>
-          </a:xfrm>
-          <a:prstGeom prst="rect">
-            <a:avLst/>
-          </a:prstGeom>
-        </p:spPr>
-        <p:txBody>
-          <a:bodyPr lIns="0" tIns="0" rIns="0" bIns="0" rtlCol="0" anchor="t">
-            <a:spAutoFit/>
-          </a:bodyPr>
-          <a:lstStyle/>
-          <a:p>
-            <a:pPr algn="ctr">
+              <a:t>→ 11</a:t>
+            </a:r>
+            <a:r>
+              <a:rPr lang="en-US" sz="3799" baseline="30000" dirty="0">
+                <a:solidFill>
+                  <a:srgbClr val="FFDE59"/>
+                </a:solidFill>
+                <a:latin typeface="Celandine"/>
+                <a:ea typeface="Celandine"/>
+                <a:cs typeface="Celandine"/>
+                <a:sym typeface="Celandine"/>
+              </a:rPr>
+              <a:t>th</a:t>
+            </a:r>
+            <a:endParaRPr lang="en-US" sz="3799" dirty="0">
+              <a:solidFill>
+                <a:srgbClr val="FFDE59"/>
+              </a:solidFill>
+              <a:latin typeface="Celandine"/>
+              <a:ea typeface="Celandine"/>
+              <a:cs typeface="Celandine"/>
+              <a:sym typeface="Celandine"/>
+            </a:endParaRPr>
+          </a:p>
+          <a:p>
+            <a:pPr>
               <a:lnSpc>
                 <a:spcPts val="5319"/>
               </a:lnSpc>
@@ -5048,7 +5006,7 @@
               </a:spcBef>
             </a:pPr>
             <a:r>
-              <a:rPr lang="en-US" sz="3799">
+              <a:rPr lang="en-US" sz="3799" dirty="0">
                 <a:solidFill>
                   <a:srgbClr val="FFDE59"/>
                 </a:solidFill>
@@ -5061,7 +5019,7 @@
             </a:r>
           </a:p>
           <a:p>
-            <a:pPr algn="ctr">
+            <a:pPr>
               <a:lnSpc>
                 <a:spcPts val="5319"/>
               </a:lnSpc>
@@ -5070,7 +5028,7 @@
               </a:spcBef>
             </a:pPr>
             <a:r>
-              <a:rPr lang="en-US" sz="3799">
+              <a:rPr lang="en-US" sz="3799" dirty="0">
                 <a:solidFill>
                   <a:srgbClr val="FFDE59"/>
                 </a:solidFill>
@@ -5082,120 +5040,8 @@
               <a:t>→ World Students’ Day</a:t>
             </a:r>
           </a:p>
-        </p:txBody>
-      </p:sp>
-      <p:grpSp>
-        <p:nvGrpSpPr>
-          <p:cNvPr id="17" name="Group 17"/>
-          <p:cNvGrpSpPr/>
-          <p:nvPr/>
-        </p:nvGrpSpPr>
-        <p:grpSpPr>
-          <a:xfrm>
-            <a:off x="7314075" y="5143500"/>
-            <a:ext cx="5338505" cy="1946875"/>
-            <a:chOff x="0" y="0"/>
-            <a:chExt cx="1406026" cy="512757"/>
-          </a:xfrm>
-        </p:grpSpPr>
-        <p:sp>
-          <p:nvSpPr>
-            <p:cNvPr id="18" name="Freeform 18"/>
-            <p:cNvSpPr/>
-            <p:nvPr/>
-          </p:nvSpPr>
-          <p:spPr>
-            <a:xfrm>
-              <a:off x="0" y="0"/>
-              <a:ext cx="1406026" cy="512757"/>
-            </a:xfrm>
-            <a:custGeom>
-              <a:avLst/>
-              <a:gdLst/>
-              <a:ahLst/>
-              <a:cxnLst/>
-              <a:rect l="l" t="t" r="r" b="b"/>
-              <a:pathLst>
-                <a:path w="1406026" h="512757">
-                  <a:moveTo>
-                    <a:pt x="0" y="0"/>
-                  </a:moveTo>
-                  <a:lnTo>
-                    <a:pt x="1406026" y="0"/>
-                  </a:lnTo>
-                  <a:lnTo>
-                    <a:pt x="1406026" y="512757"/>
-                  </a:lnTo>
-                  <a:lnTo>
-                    <a:pt x="0" y="512757"/>
-                  </a:lnTo>
-                  <a:close/>
-                </a:path>
-              </a:pathLst>
-            </a:custGeom>
-            <a:solidFill>
-              <a:srgbClr val="6766E0"/>
-            </a:solidFill>
-          </p:spPr>
-          <p:txBody>
-            <a:bodyPr/>
-            <a:lstStyle/>
-            <a:p>
-              <a:endParaRPr lang="en-US"/>
-            </a:p>
-          </p:txBody>
-        </p:sp>
-        <p:sp>
-          <p:nvSpPr>
-            <p:cNvPr id="19" name="TextBox 19"/>
-            <p:cNvSpPr txBox="1"/>
-            <p:nvPr/>
-          </p:nvSpPr>
-          <p:spPr>
-            <a:xfrm>
-              <a:off x="0" y="-38100"/>
-              <a:ext cx="1406026" cy="550857"/>
-            </a:xfrm>
-            <a:prstGeom prst="rect">
-              <a:avLst/>
-            </a:prstGeom>
-          </p:spPr>
-          <p:txBody>
-            <a:bodyPr lIns="50800" tIns="50800" rIns="50800" bIns="50800" rtlCol="0" anchor="ctr"/>
-            <a:lstStyle/>
-            <a:p>
-              <a:pPr algn="ctr">
-                <a:lnSpc>
-                  <a:spcPts val="2659"/>
-                </a:lnSpc>
-              </a:pPr>
-              <a:endParaRPr/>
-            </a:p>
-          </p:txBody>
-        </p:sp>
-      </p:grpSp>
-      <p:sp>
-        <p:nvSpPr>
-          <p:cNvPr id="20" name="TextBox 20"/>
-          <p:cNvSpPr txBox="1"/>
-          <p:nvPr/>
-        </p:nvSpPr>
-        <p:spPr>
-          <a:xfrm>
-            <a:off x="3977237" y="5777193"/>
-            <a:ext cx="7908429" cy="1313181"/>
-          </a:xfrm>
-          <a:prstGeom prst="rect">
-            <a:avLst/>
-          </a:prstGeom>
-        </p:spPr>
-        <p:txBody>
-          <a:bodyPr lIns="0" tIns="0" rIns="0" bIns="0" rtlCol="0" anchor="t">
-            <a:spAutoFit/>
-          </a:bodyPr>
-          <a:lstStyle/>
-          <a:p>
-            <a:pPr algn="ctr">
+          <a:p>
+            <a:pPr>
               <a:lnSpc>
                 <a:spcPts val="5319"/>
               </a:lnSpc>
@@ -5204,7 +5050,7 @@
               </a:spcBef>
             </a:pPr>
             <a:r>
-              <a:rPr lang="en-US" sz="3799">
+              <a:rPr lang="en-US" sz="3799" dirty="0">
                 <a:solidFill>
                   <a:srgbClr val="FFDE59"/>
                 </a:solidFill>
@@ -5217,7 +5063,7 @@
             </a:r>
           </a:p>
           <a:p>
-            <a:pPr algn="ctr">
+            <a:pPr>
               <a:lnSpc>
                 <a:spcPts val="5319"/>
               </a:lnSpc>
@@ -5226,7 +5072,7 @@
               </a:spcBef>
             </a:pPr>
             <a:r>
-              <a:rPr lang="en-US" sz="3799">
+              <a:rPr lang="en-US" sz="3799" dirty="0">
                 <a:solidFill>
                   <a:srgbClr val="FFDE59"/>
                 </a:solidFill>
@@ -5238,120 +5084,8 @@
               <a:t>→ 1969</a:t>
             </a:r>
           </a:p>
-        </p:txBody>
-      </p:sp>
-      <p:grpSp>
-        <p:nvGrpSpPr>
-          <p:cNvPr id="21" name="Group 21"/>
-          <p:cNvGrpSpPr/>
-          <p:nvPr/>
-        </p:nvGrpSpPr>
-        <p:grpSpPr>
-          <a:xfrm>
-            <a:off x="7095610" y="6382681"/>
-            <a:ext cx="2048390" cy="1234188"/>
-            <a:chOff x="0" y="0"/>
-            <a:chExt cx="539494" cy="325054"/>
-          </a:xfrm>
-        </p:grpSpPr>
-        <p:sp>
-          <p:nvSpPr>
-            <p:cNvPr id="22" name="Freeform 22"/>
-            <p:cNvSpPr/>
-            <p:nvPr/>
-          </p:nvSpPr>
-          <p:spPr>
-            <a:xfrm>
-              <a:off x="0" y="0"/>
-              <a:ext cx="539494" cy="325054"/>
-            </a:xfrm>
-            <a:custGeom>
-              <a:avLst/>
-              <a:gdLst/>
-              <a:ahLst/>
-              <a:cxnLst/>
-              <a:rect l="l" t="t" r="r" b="b"/>
-              <a:pathLst>
-                <a:path w="539494" h="325054">
-                  <a:moveTo>
-                    <a:pt x="0" y="0"/>
-                  </a:moveTo>
-                  <a:lnTo>
-                    <a:pt x="539494" y="0"/>
-                  </a:lnTo>
-                  <a:lnTo>
-                    <a:pt x="539494" y="325054"/>
-                  </a:lnTo>
-                  <a:lnTo>
-                    <a:pt x="0" y="325054"/>
-                  </a:lnTo>
-                  <a:close/>
-                </a:path>
-              </a:pathLst>
-            </a:custGeom>
-            <a:solidFill>
-              <a:srgbClr val="6766E0"/>
-            </a:solidFill>
-          </p:spPr>
-          <p:txBody>
-            <a:bodyPr/>
-            <a:lstStyle/>
-            <a:p>
-              <a:endParaRPr lang="en-US"/>
-            </a:p>
-          </p:txBody>
-        </p:sp>
-        <p:sp>
-          <p:nvSpPr>
-            <p:cNvPr id="23" name="TextBox 23"/>
-            <p:cNvSpPr txBox="1"/>
-            <p:nvPr/>
-          </p:nvSpPr>
-          <p:spPr>
-            <a:xfrm>
-              <a:off x="0" y="-38100"/>
-              <a:ext cx="539494" cy="363154"/>
-            </a:xfrm>
-            <a:prstGeom prst="rect">
-              <a:avLst/>
-            </a:prstGeom>
-          </p:spPr>
-          <p:txBody>
-            <a:bodyPr lIns="50800" tIns="50800" rIns="50800" bIns="50800" rtlCol="0" anchor="ctr"/>
-            <a:lstStyle/>
-            <a:p>
-              <a:pPr algn="ctr">
-                <a:lnSpc>
-                  <a:spcPts val="2659"/>
-                </a:lnSpc>
-              </a:pPr>
-              <a:endParaRPr/>
-            </a:p>
-          </p:txBody>
-        </p:sp>
-      </p:grpSp>
-      <p:sp>
-        <p:nvSpPr>
-          <p:cNvPr id="24" name="TextBox 24"/>
-          <p:cNvSpPr txBox="1"/>
-          <p:nvPr/>
-        </p:nvSpPr>
-        <p:spPr>
-          <a:xfrm>
-            <a:off x="4036809" y="6922178"/>
-            <a:ext cx="5836890" cy="1313181"/>
-          </a:xfrm>
-          <a:prstGeom prst="rect">
-            <a:avLst/>
-          </a:prstGeom>
-        </p:spPr>
-        <p:txBody>
-          <a:bodyPr lIns="0" tIns="0" rIns="0" bIns="0" rtlCol="0" anchor="t">
-            <a:spAutoFit/>
-          </a:bodyPr>
-          <a:lstStyle/>
-          <a:p>
-            <a:pPr algn="ctr">
+          <a:p>
+            <a:pPr>
               <a:lnSpc>
                 <a:spcPts val="5319"/>
               </a:lnSpc>
@@ -5360,7 +5094,7 @@
               </a:spcBef>
             </a:pPr>
             <a:r>
-              <a:rPr lang="en-US" sz="3799">
+              <a:rPr lang="en-US" sz="3799" dirty="0">
                 <a:solidFill>
                   <a:srgbClr val="FFDE59"/>
                 </a:solidFill>
@@ -5369,11 +5103,11 @@
                 <a:cs typeface="Celandine"/>
                 <a:sym typeface="Celandine"/>
               </a:rPr>
-              <a:t>Kalam becomes President ?</a:t>
-            </a:r>
-          </a:p>
-          <a:p>
-            <a:pPr algn="ctr">
+              <a:t>Kalam becomes President in which year?</a:t>
+            </a:r>
+          </a:p>
+          <a:p>
+            <a:pPr>
               <a:lnSpc>
                 <a:spcPts val="5319"/>
               </a:lnSpc>
@@ -5382,7 +5116,7 @@
               </a:spcBef>
             </a:pPr>
             <a:r>
-              <a:rPr lang="en-US" sz="3799">
+              <a:rPr lang="en-US" sz="3799" dirty="0">
                 <a:solidFill>
                   <a:srgbClr val="FFDE59"/>
                 </a:solidFill>
@@ -5391,123 +5125,11 @@
                 <a:cs typeface="Celandine"/>
                 <a:sym typeface="Celandine"/>
               </a:rPr>
-              <a:t>2002→  </a:t>
-            </a:r>
-          </a:p>
-        </p:txBody>
-      </p:sp>
-      <p:grpSp>
-        <p:nvGrpSpPr>
-          <p:cNvPr id="25" name="Group 25"/>
-          <p:cNvGrpSpPr/>
-          <p:nvPr/>
-        </p:nvGrpSpPr>
-        <p:grpSpPr>
-          <a:xfrm>
-            <a:off x="6016287" y="7616868"/>
-            <a:ext cx="2595576" cy="1522299"/>
-            <a:chOff x="0" y="0"/>
-            <a:chExt cx="683609" cy="400935"/>
-          </a:xfrm>
-        </p:grpSpPr>
-        <p:sp>
-          <p:nvSpPr>
-            <p:cNvPr id="26" name="Freeform 26"/>
-            <p:cNvSpPr/>
-            <p:nvPr/>
-          </p:nvSpPr>
-          <p:spPr>
-            <a:xfrm>
-              <a:off x="0" y="0"/>
-              <a:ext cx="683609" cy="400935"/>
-            </a:xfrm>
-            <a:custGeom>
-              <a:avLst/>
-              <a:gdLst/>
-              <a:ahLst/>
-              <a:cxnLst/>
-              <a:rect l="l" t="t" r="r" b="b"/>
-              <a:pathLst>
-                <a:path w="683609" h="400935">
-                  <a:moveTo>
-                    <a:pt x="0" y="0"/>
-                  </a:moveTo>
-                  <a:lnTo>
-                    <a:pt x="683609" y="0"/>
-                  </a:lnTo>
-                  <a:lnTo>
-                    <a:pt x="683609" y="400935"/>
-                  </a:lnTo>
-                  <a:lnTo>
-                    <a:pt x="0" y="400935"/>
-                  </a:lnTo>
-                  <a:close/>
-                </a:path>
-              </a:pathLst>
-            </a:custGeom>
-            <a:solidFill>
-              <a:srgbClr val="6766E0"/>
-            </a:solidFill>
-          </p:spPr>
-          <p:txBody>
-            <a:bodyPr/>
-            <a:lstStyle/>
-            <a:p>
-              <a:endParaRPr lang="en-US"/>
-            </a:p>
-          </p:txBody>
-        </p:sp>
-        <p:sp>
-          <p:nvSpPr>
-            <p:cNvPr id="27" name="TextBox 27"/>
-            <p:cNvSpPr txBox="1"/>
-            <p:nvPr/>
-          </p:nvSpPr>
-          <p:spPr>
-            <a:xfrm>
-              <a:off x="0" y="-38100"/>
-              <a:ext cx="683609" cy="439035"/>
-            </a:xfrm>
-            <a:prstGeom prst="rect">
-              <a:avLst/>
-            </a:prstGeom>
-          </p:spPr>
-          <p:txBody>
-            <a:bodyPr lIns="50800" tIns="50800" rIns="50800" bIns="50800" rtlCol="0" anchor="ctr"/>
-            <a:lstStyle/>
-            <a:p>
-              <a:pPr algn="ctr">
-                <a:lnSpc>
-                  <a:spcPts val="2659"/>
-                </a:lnSpc>
-              </a:pPr>
-              <a:endParaRPr/>
-            </a:p>
-          </p:txBody>
-        </p:sp>
-      </p:grpSp>
-      <p:sp>
-        <p:nvSpPr>
-          <p:cNvPr id="28" name="TextBox 28"/>
-          <p:cNvSpPr txBox="1"/>
-          <p:nvPr/>
-        </p:nvSpPr>
-        <p:spPr>
-          <a:xfrm>
-            <a:off x="4025234" y="7845468"/>
-            <a:ext cx="7812435" cy="1313181"/>
-          </a:xfrm>
-          <a:prstGeom prst="rect">
-            <a:avLst/>
-          </a:prstGeom>
-        </p:spPr>
-        <p:txBody>
-          <a:bodyPr lIns="0" tIns="0" rIns="0" bIns="0" rtlCol="0" anchor="t">
-            <a:spAutoFit/>
-          </a:bodyPr>
-          <a:lstStyle/>
-          <a:p>
-            <a:pPr algn="ctr">
+              <a:t>→ 2002</a:t>
+            </a:r>
+          </a:p>
+          <a:p>
+            <a:pPr>
               <a:lnSpc>
                 <a:spcPts val="5319"/>
               </a:lnSpc>
@@ -5516,7 +5138,7 @@
               </a:spcBef>
             </a:pPr>
             <a:r>
-              <a:rPr lang="en-US" sz="3799">
+              <a:rPr lang="en-US" sz="3799" dirty="0">
                 <a:solidFill>
                   <a:srgbClr val="FFDE59"/>
                 </a:solidFill>
@@ -5525,11 +5147,11 @@
                 <a:cs typeface="Celandine"/>
                 <a:sym typeface="Celandine"/>
               </a:rPr>
-              <a:t>India’s first satellite launch (SLV-3) </a:t>
-            </a:r>
-          </a:p>
-          <a:p>
-            <a:pPr algn="ctr">
+              <a:t>India’s first satellite launch (SLV-3) in which year?</a:t>
+            </a:r>
+          </a:p>
+          <a:p>
+            <a:pPr>
               <a:lnSpc>
                 <a:spcPts val="5319"/>
               </a:lnSpc>
@@ -5538,7 +5160,7 @@
               </a:spcBef>
             </a:pPr>
             <a:r>
-              <a:rPr lang="en-US" sz="3799">
+              <a:rPr lang="en-US" sz="3799" dirty="0">
                 <a:solidFill>
                   <a:srgbClr val="FFDE59"/>
                 </a:solidFill>
@@ -5552,97 +5174,375 @@
           </a:p>
         </p:txBody>
       </p:sp>
-      <p:grpSp>
-        <p:nvGrpSpPr>
-          <p:cNvPr id="29" name="Group 29"/>
-          <p:cNvGrpSpPr/>
+      <p:sp>
+        <p:nvSpPr>
+          <p:cNvPr id="37" name="Rectangle 36">
+            <a:extLst>
+              <a:ext uri="{FF2B5EF4-FFF2-40B4-BE49-F238E27FC236}">
+                <a16:creationId xmlns:a16="http://schemas.microsoft.com/office/drawing/2014/main" id="{399E54A2-4187-6C5F-ED66-D5E9EA9D210D}"/>
+              </a:ext>
+            </a:extLst>
+          </p:cNvPr>
+          <p:cNvSpPr/>
           <p:nvPr/>
-        </p:nvGrpSpPr>
-        <p:grpSpPr>
-          <a:xfrm>
-            <a:off x="6907257" y="8540159"/>
-            <a:ext cx="2048390" cy="975112"/>
-            <a:chOff x="0" y="0"/>
-            <a:chExt cx="539494" cy="256820"/>
-          </a:xfrm>
-        </p:grpSpPr>
-        <p:sp>
-          <p:nvSpPr>
-            <p:cNvPr id="30" name="Freeform 30"/>
-            <p:cNvSpPr/>
-            <p:nvPr/>
-          </p:nvSpPr>
-          <p:spPr>
-            <a:xfrm>
-              <a:off x="0" y="0"/>
-              <a:ext cx="539494" cy="256820"/>
-            </a:xfrm>
-            <a:custGeom>
-              <a:avLst/>
-              <a:gdLst/>
-              <a:ahLst/>
-              <a:cxnLst/>
-              <a:rect l="l" t="t" r="r" b="b"/>
-              <a:pathLst>
-                <a:path w="539494" h="256820">
-                  <a:moveTo>
-                    <a:pt x="0" y="0"/>
-                  </a:moveTo>
-                  <a:lnTo>
-                    <a:pt x="539494" y="0"/>
-                  </a:lnTo>
-                  <a:lnTo>
-                    <a:pt x="539494" y="256820"/>
-                  </a:lnTo>
-                  <a:lnTo>
-                    <a:pt x="0" y="256820"/>
-                  </a:lnTo>
-                  <a:close/>
-                </a:path>
-              </a:pathLst>
-            </a:custGeom>
-            <a:solidFill>
-              <a:srgbClr val="6766E0"/>
-            </a:solidFill>
-          </p:spPr>
-          <p:txBody>
-            <a:bodyPr/>
-            <a:lstStyle/>
-            <a:p>
-              <a:endParaRPr lang="en-US"/>
-            </a:p>
-          </p:txBody>
-        </p:sp>
-        <p:sp>
-          <p:nvSpPr>
-            <p:cNvPr id="31" name="TextBox 31"/>
-            <p:cNvSpPr txBox="1"/>
-            <p:nvPr/>
-          </p:nvSpPr>
-          <p:spPr>
-            <a:xfrm>
-              <a:off x="0" y="-38100"/>
-              <a:ext cx="539494" cy="294920"/>
-            </a:xfrm>
-            <a:prstGeom prst="rect">
-              <a:avLst/>
-            </a:prstGeom>
-          </p:spPr>
-          <p:txBody>
-            <a:bodyPr lIns="50800" tIns="50800" rIns="50800" bIns="50800" rtlCol="0" anchor="ctr"/>
-            <a:lstStyle/>
-            <a:p>
-              <a:pPr algn="ctr">
-                <a:lnSpc>
-                  <a:spcPts val="2659"/>
-                </a:lnSpc>
-              </a:pPr>
-              <a:endParaRPr/>
-            </a:p>
-          </p:txBody>
-        </p:sp>
-      </p:grpSp>
+        </p:nvSpPr>
+        <p:spPr>
+          <a:xfrm>
+            <a:off x="1974289" y="1790700"/>
+            <a:ext cx="9379511" cy="533400"/>
+          </a:xfrm>
+          <a:prstGeom prst="rect">
+            <a:avLst/>
+          </a:prstGeom>
+          <a:solidFill>
+            <a:srgbClr val="6766E0"/>
+          </a:solidFill>
+          <a:ln>
+            <a:noFill/>
+          </a:ln>
+        </p:spPr>
+        <p:style>
+          <a:lnRef idx="2">
+            <a:schemeClr val="accent1">
+              <a:shade val="15000"/>
+            </a:schemeClr>
+          </a:lnRef>
+          <a:fillRef idx="1">
+            <a:schemeClr val="accent1"/>
+          </a:fillRef>
+          <a:effectRef idx="0">
+            <a:schemeClr val="accent1"/>
+          </a:effectRef>
+          <a:fontRef idx="minor">
+            <a:schemeClr val="lt1"/>
+          </a:fontRef>
+        </p:style>
+        <p:txBody>
+          <a:bodyPr rtlCol="0" anchor="ctr"/>
+          <a:lstStyle/>
+          <a:p>
+            <a:pPr algn="ctr"/>
+            <a:endParaRPr lang="en-US"/>
+          </a:p>
+        </p:txBody>
+      </p:sp>
+      <p:sp>
+        <p:nvSpPr>
+          <p:cNvPr id="38" name="Rectangle 37">
+            <a:extLst>
+              <a:ext uri="{FF2B5EF4-FFF2-40B4-BE49-F238E27FC236}">
+                <a16:creationId xmlns:a16="http://schemas.microsoft.com/office/drawing/2014/main" id="{E7D88117-3B13-0F5F-25C1-274EF138A2EB}"/>
+              </a:ext>
+            </a:extLst>
+          </p:cNvPr>
+          <p:cNvSpPr/>
+          <p:nvPr/>
+        </p:nvSpPr>
+        <p:spPr>
+          <a:xfrm>
+            <a:off x="2026730" y="3162663"/>
+            <a:ext cx="9379511" cy="533400"/>
+          </a:xfrm>
+          <a:prstGeom prst="rect">
+            <a:avLst/>
+          </a:prstGeom>
+          <a:solidFill>
+            <a:srgbClr val="6766E0"/>
+          </a:solidFill>
+          <a:ln>
+            <a:noFill/>
+          </a:ln>
+        </p:spPr>
+        <p:style>
+          <a:lnRef idx="2">
+            <a:schemeClr val="accent1">
+              <a:shade val="15000"/>
+            </a:schemeClr>
+          </a:lnRef>
+          <a:fillRef idx="1">
+            <a:schemeClr val="accent1"/>
+          </a:fillRef>
+          <a:effectRef idx="0">
+            <a:schemeClr val="accent1"/>
+          </a:effectRef>
+          <a:fontRef idx="minor">
+            <a:schemeClr val="lt1"/>
+          </a:fontRef>
+        </p:style>
+        <p:txBody>
+          <a:bodyPr rtlCol="0" anchor="ctr"/>
+          <a:lstStyle/>
+          <a:p>
+            <a:pPr algn="ctr"/>
+            <a:endParaRPr lang="en-US"/>
+          </a:p>
+        </p:txBody>
+      </p:sp>
+      <p:sp>
+        <p:nvSpPr>
+          <p:cNvPr id="39" name="Rectangle 38">
+            <a:extLst>
+              <a:ext uri="{FF2B5EF4-FFF2-40B4-BE49-F238E27FC236}">
+                <a16:creationId xmlns:a16="http://schemas.microsoft.com/office/drawing/2014/main" id="{CAE563A1-C7E5-0C36-A6E3-A4CBB6BA2403}"/>
+              </a:ext>
+            </a:extLst>
+          </p:cNvPr>
+          <p:cNvSpPr/>
+          <p:nvPr/>
+        </p:nvSpPr>
+        <p:spPr>
+          <a:xfrm>
+            <a:off x="1999516" y="4537769"/>
+            <a:ext cx="9379511" cy="533400"/>
+          </a:xfrm>
+          <a:prstGeom prst="rect">
+            <a:avLst/>
+          </a:prstGeom>
+          <a:solidFill>
+            <a:srgbClr val="6766E0"/>
+          </a:solidFill>
+          <a:ln>
+            <a:noFill/>
+          </a:ln>
+        </p:spPr>
+        <p:style>
+          <a:lnRef idx="2">
+            <a:schemeClr val="accent1">
+              <a:shade val="15000"/>
+            </a:schemeClr>
+          </a:lnRef>
+          <a:fillRef idx="1">
+            <a:schemeClr val="accent1"/>
+          </a:fillRef>
+          <a:effectRef idx="0">
+            <a:schemeClr val="accent1"/>
+          </a:effectRef>
+          <a:fontRef idx="minor">
+            <a:schemeClr val="lt1"/>
+          </a:fontRef>
+        </p:style>
+        <p:txBody>
+          <a:bodyPr rtlCol="0" anchor="ctr"/>
+          <a:lstStyle/>
+          <a:p>
+            <a:pPr algn="ctr"/>
+            <a:endParaRPr lang="en-US"/>
+          </a:p>
+        </p:txBody>
+      </p:sp>
+      <p:sp>
+        <p:nvSpPr>
+          <p:cNvPr id="40" name="Rectangle 39">
+            <a:extLst>
+              <a:ext uri="{FF2B5EF4-FFF2-40B4-BE49-F238E27FC236}">
+                <a16:creationId xmlns:a16="http://schemas.microsoft.com/office/drawing/2014/main" id="{F0BBC8F2-5FF1-6EA3-9F12-AD94B8CF3E7D}"/>
+              </a:ext>
+            </a:extLst>
+          </p:cNvPr>
+          <p:cNvSpPr/>
+          <p:nvPr/>
+        </p:nvSpPr>
+        <p:spPr>
+          <a:xfrm>
+            <a:off x="1974288" y="5772150"/>
+            <a:ext cx="9379511" cy="533400"/>
+          </a:xfrm>
+          <a:prstGeom prst="rect">
+            <a:avLst/>
+          </a:prstGeom>
+          <a:solidFill>
+            <a:srgbClr val="6766E0"/>
+          </a:solidFill>
+          <a:ln>
+            <a:noFill/>
+          </a:ln>
+        </p:spPr>
+        <p:style>
+          <a:lnRef idx="2">
+            <a:schemeClr val="accent1">
+              <a:shade val="15000"/>
+            </a:schemeClr>
+          </a:lnRef>
+          <a:fillRef idx="1">
+            <a:schemeClr val="accent1"/>
+          </a:fillRef>
+          <a:effectRef idx="0">
+            <a:schemeClr val="accent1"/>
+          </a:effectRef>
+          <a:fontRef idx="minor">
+            <a:schemeClr val="lt1"/>
+          </a:fontRef>
+        </p:style>
+        <p:txBody>
+          <a:bodyPr rtlCol="0" anchor="ctr"/>
+          <a:lstStyle/>
+          <a:p>
+            <a:pPr algn="ctr"/>
+            <a:endParaRPr lang="en-US"/>
+          </a:p>
+        </p:txBody>
+      </p:sp>
+      <p:sp>
+        <p:nvSpPr>
+          <p:cNvPr id="41" name="Rectangle 40">
+            <a:extLst>
+              <a:ext uri="{FF2B5EF4-FFF2-40B4-BE49-F238E27FC236}">
+                <a16:creationId xmlns:a16="http://schemas.microsoft.com/office/drawing/2014/main" id="{81D7D506-7ECE-D6C2-6E2F-AB0A5518618D}"/>
+              </a:ext>
+            </a:extLst>
+          </p:cNvPr>
+          <p:cNvSpPr/>
+          <p:nvPr/>
+        </p:nvSpPr>
+        <p:spPr>
+          <a:xfrm>
+            <a:off x="1977745" y="7284838"/>
+            <a:ext cx="9379511" cy="533400"/>
+          </a:xfrm>
+          <a:prstGeom prst="rect">
+            <a:avLst/>
+          </a:prstGeom>
+          <a:solidFill>
+            <a:srgbClr val="6766E0"/>
+          </a:solidFill>
+          <a:ln>
+            <a:noFill/>
+          </a:ln>
+        </p:spPr>
+        <p:style>
+          <a:lnRef idx="2">
+            <a:schemeClr val="accent1">
+              <a:shade val="15000"/>
+            </a:schemeClr>
+          </a:lnRef>
+          <a:fillRef idx="1">
+            <a:schemeClr val="accent1"/>
+          </a:fillRef>
+          <a:effectRef idx="0">
+            <a:schemeClr val="accent1"/>
+          </a:effectRef>
+          <a:fontRef idx="minor">
+            <a:schemeClr val="lt1"/>
+          </a:fontRef>
+        </p:style>
+        <p:txBody>
+          <a:bodyPr rtlCol="0" anchor="ctr"/>
+          <a:lstStyle/>
+          <a:p>
+            <a:pPr algn="ctr"/>
+            <a:endParaRPr lang="en-US"/>
+          </a:p>
+        </p:txBody>
+      </p:sp>
+      <p:sp>
+        <p:nvSpPr>
+          <p:cNvPr id="42" name="Rectangle 41">
+            <a:extLst>
+              <a:ext uri="{FF2B5EF4-FFF2-40B4-BE49-F238E27FC236}">
+                <a16:creationId xmlns:a16="http://schemas.microsoft.com/office/drawing/2014/main" id="{296548A9-71C7-EF15-F586-DC1AA2EB1813}"/>
+              </a:ext>
+            </a:extLst>
+          </p:cNvPr>
+          <p:cNvSpPr/>
+          <p:nvPr/>
+        </p:nvSpPr>
+        <p:spPr>
+          <a:xfrm>
+            <a:off x="2026730" y="8519219"/>
+            <a:ext cx="9379511" cy="533400"/>
+          </a:xfrm>
+          <a:prstGeom prst="rect">
+            <a:avLst/>
+          </a:prstGeom>
+          <a:solidFill>
+            <a:srgbClr val="6766E0"/>
+          </a:solidFill>
+          <a:ln>
+            <a:noFill/>
+          </a:ln>
+        </p:spPr>
+        <p:style>
+          <a:lnRef idx="2">
+            <a:schemeClr val="accent1">
+              <a:shade val="15000"/>
+            </a:schemeClr>
+          </a:lnRef>
+          <a:fillRef idx="1">
+            <a:schemeClr val="accent1"/>
+          </a:fillRef>
+          <a:effectRef idx="0">
+            <a:schemeClr val="accent1"/>
+          </a:effectRef>
+          <a:fontRef idx="minor">
+            <a:schemeClr val="lt1"/>
+          </a:fontRef>
+        </p:style>
+        <p:txBody>
+          <a:bodyPr rtlCol="0" anchor="ctr"/>
+          <a:lstStyle/>
+          <a:p>
+            <a:pPr algn="ctr"/>
+            <a:endParaRPr lang="en-US"/>
+          </a:p>
+        </p:txBody>
+      </p:sp>
+      <p:sp>
+        <p:nvSpPr>
+          <p:cNvPr id="48" name="TextBox 47">
+            <a:extLst>
+              <a:ext uri="{FF2B5EF4-FFF2-40B4-BE49-F238E27FC236}">
+                <a16:creationId xmlns:a16="http://schemas.microsoft.com/office/drawing/2014/main" id="{A6BA8605-E141-C068-0F4F-D2E34B65F25B}"/>
+              </a:ext>
+            </a:extLst>
+          </p:cNvPr>
+          <p:cNvSpPr txBox="1"/>
+          <p:nvPr/>
+        </p:nvSpPr>
+        <p:spPr>
+          <a:xfrm>
+            <a:off x="6875062" y="98035"/>
+            <a:ext cx="4563836" cy="804964"/>
+          </a:xfrm>
+          <a:prstGeom prst="rect">
+            <a:avLst/>
+          </a:prstGeom>
+          <a:noFill/>
+        </p:spPr>
+        <p:txBody>
+          <a:bodyPr wrap="square">
+            <a:spAutoFit/>
+          </a:bodyPr>
+          <a:lstStyle/>
+          <a:p>
+            <a:pPr>
+              <a:lnSpc>
+                <a:spcPts val="5319"/>
+              </a:lnSpc>
+              <a:spcBef>
+                <a:spcPct val="0"/>
+              </a:spcBef>
+            </a:pPr>
+            <a:r>
+              <a:rPr lang="en-US" sz="5400" dirty="0">
+                <a:solidFill>
+                  <a:srgbClr val="FFDE59"/>
+                </a:solidFill>
+                <a:latin typeface="Celandine"/>
+                <a:ea typeface="Celandine"/>
+                <a:cs typeface="Celandine"/>
+                <a:sym typeface="Celandine"/>
+              </a:rPr>
+              <a:t>Questionnaire</a:t>
+            </a:r>
+          </a:p>
+        </p:txBody>
+      </p:sp>
     </p:spTree>
+    <p:extLst>
+      <p:ext uri="{BB962C8B-B14F-4D97-AF65-F5344CB8AC3E}">
+        <p14:creationId xmlns:p14="http://schemas.microsoft.com/office/powerpoint/2010/main" val="1392048247"/>
+      </p:ext>
+    </p:extLst>
   </p:cSld>
   <p:clrMapOvr>
     <a:masterClrMapping/>
@@ -5666,7 +5566,13 @@
     </p:bg>
     <p:spTree>
       <p:nvGrpSpPr>
-        <p:cNvPr id="1" name=""/>
+        <p:cNvPr id="1" name="">
+          <a:extLst>
+            <a:ext uri="{FF2B5EF4-FFF2-40B4-BE49-F238E27FC236}">
+              <a16:creationId xmlns:a16="http://schemas.microsoft.com/office/drawing/2014/main" id="{9FC51A40-0895-CA3D-445D-89C53B2F445E}"/>
+            </a:ext>
+          </a:extLst>
+        </p:cNvPr>
         <p:cNvGrpSpPr/>
         <p:nvPr/>
       </p:nvGrpSpPr>
@@ -5680,13 +5586,19 @@
       </p:grpSpPr>
       <p:grpSp>
         <p:nvGrpSpPr>
-          <p:cNvPr id="2" name="Group 2"/>
+          <p:cNvPr id="2" name="Group 2">
+            <a:extLst>
+              <a:ext uri="{FF2B5EF4-FFF2-40B4-BE49-F238E27FC236}">
+                <a16:creationId xmlns:a16="http://schemas.microsoft.com/office/drawing/2014/main" id="{25C4F226-9B56-08B1-1E11-A7FD8999A925}"/>
+              </a:ext>
+            </a:extLst>
+          </p:cNvPr>
           <p:cNvGrpSpPr/>
           <p:nvPr/>
         </p:nvGrpSpPr>
         <p:grpSpPr>
           <a:xfrm>
-            <a:off x="4505" y="-131938"/>
+            <a:off x="16270481" y="0"/>
             <a:ext cx="2048390" cy="10550876"/>
             <a:chOff x="0" y="0"/>
             <a:chExt cx="539494" cy="2778832"/>
@@ -5694,7 +5606,13 @@
         </p:grpSpPr>
         <p:sp>
           <p:nvSpPr>
-            <p:cNvPr id="3" name="Freeform 3"/>
+            <p:cNvPr id="3" name="Freeform 3">
+              <a:extLst>
+                <a:ext uri="{FF2B5EF4-FFF2-40B4-BE49-F238E27FC236}">
+                  <a16:creationId xmlns:a16="http://schemas.microsoft.com/office/drawing/2014/main" id="{DCABB53F-D3DF-93B8-8693-54B8793F07FF}"/>
+                </a:ext>
+              </a:extLst>
+            </p:cNvPr>
             <p:cNvSpPr/>
             <p:nvPr/>
           </p:nvSpPr>
@@ -5741,7 +5659,13 @@
         </p:sp>
         <p:sp>
           <p:nvSpPr>
-            <p:cNvPr id="4" name="TextBox 4"/>
+            <p:cNvPr id="4" name="TextBox 4">
+              <a:extLst>
+                <a:ext uri="{FF2B5EF4-FFF2-40B4-BE49-F238E27FC236}">
+                  <a16:creationId xmlns:a16="http://schemas.microsoft.com/office/drawing/2014/main" id="{03E8050C-1335-34AA-EA09-7895D512293A}"/>
+                </a:ext>
+              </a:extLst>
+            </p:cNvPr>
             <p:cNvSpPr txBox="1"/>
             <p:nvPr/>
           </p:nvSpPr>
@@ -5770,28 +5694,40 @@
       </p:grpSp>
       <p:grpSp>
         <p:nvGrpSpPr>
-          <p:cNvPr id="5" name="Group 5"/>
+          <p:cNvPr id="5" name="Group 5">
+            <a:extLst>
+              <a:ext uri="{FF2B5EF4-FFF2-40B4-BE49-F238E27FC236}">
+                <a16:creationId xmlns:a16="http://schemas.microsoft.com/office/drawing/2014/main" id="{AE924AF8-6246-3EA8-7926-B91BFA8E34DE}"/>
+              </a:ext>
+            </a:extLst>
+          </p:cNvPr>
           <p:cNvGrpSpPr/>
           <p:nvPr/>
         </p:nvGrpSpPr>
         <p:grpSpPr>
           <a:xfrm>
-            <a:off x="16235105" y="-131938"/>
-            <a:ext cx="2048390" cy="10550876"/>
+            <a:off x="1769" y="0"/>
+            <a:ext cx="1972520" cy="10287000"/>
             <a:chOff x="0" y="0"/>
-            <a:chExt cx="539494" cy="2778832"/>
+            <a:chExt cx="519511" cy="2709333"/>
           </a:xfrm>
         </p:grpSpPr>
         <p:sp>
           <p:nvSpPr>
-            <p:cNvPr id="6" name="Freeform 6"/>
+            <p:cNvPr id="6" name="Freeform 6">
+              <a:extLst>
+                <a:ext uri="{FF2B5EF4-FFF2-40B4-BE49-F238E27FC236}">
+                  <a16:creationId xmlns:a16="http://schemas.microsoft.com/office/drawing/2014/main" id="{79CE0AE9-BC6A-2C67-7CAF-456DF0EB8F73}"/>
+                </a:ext>
+              </a:extLst>
+            </p:cNvPr>
             <p:cNvSpPr/>
             <p:nvPr/>
           </p:nvSpPr>
           <p:spPr>
             <a:xfrm>
               <a:off x="0" y="0"/>
-              <a:ext cx="539494" cy="2778832"/>
+              <a:ext cx="519511" cy="2709333"/>
             </a:xfrm>
             <a:custGeom>
               <a:avLst/>
@@ -5800,18 +5736,18 @@
               <a:cxnLst/>
               <a:rect l="l" t="t" r="r" b="b"/>
               <a:pathLst>
-                <a:path w="539494" h="2778832">
+                <a:path w="519511" h="2709333">
                   <a:moveTo>
                     <a:pt x="0" y="0"/>
                   </a:moveTo>
                   <a:lnTo>
-                    <a:pt x="539494" y="0"/>
+                    <a:pt x="519511" y="0"/>
                   </a:lnTo>
                   <a:lnTo>
-                    <a:pt x="539494" y="2778832"/>
+                    <a:pt x="519511" y="2709333"/>
                   </a:lnTo>
                   <a:lnTo>
-                    <a:pt x="0" y="2778832"/>
+                    <a:pt x="0" y="2709333"/>
                   </a:lnTo>
                   <a:close/>
                 </a:path>
@@ -5831,14 +5767,20 @@
         </p:sp>
         <p:sp>
           <p:nvSpPr>
-            <p:cNvPr id="7" name="TextBox 7"/>
+            <p:cNvPr id="7" name="TextBox 7">
+              <a:extLst>
+                <a:ext uri="{FF2B5EF4-FFF2-40B4-BE49-F238E27FC236}">
+                  <a16:creationId xmlns:a16="http://schemas.microsoft.com/office/drawing/2014/main" id="{E0517369-B95C-FC80-6F41-AE0F2006E8B7}"/>
+                </a:ext>
+              </a:extLst>
+            </p:cNvPr>
             <p:cNvSpPr txBox="1"/>
             <p:nvPr/>
           </p:nvSpPr>
           <p:spPr>
             <a:xfrm>
               <a:off x="0" y="-38100"/>
-              <a:ext cx="539494" cy="2816932"/>
+              <a:ext cx="519511" cy="2747433"/>
             </a:xfrm>
             <a:prstGeom prst="rect">
               <a:avLst/>
@@ -5860,14 +5802,20 @@
       </p:grpSp>
       <p:sp>
         <p:nvSpPr>
-          <p:cNvPr id="8" name="TextBox 8"/>
+          <p:cNvPr id="33" name="TextBox 8">
+            <a:extLst>
+              <a:ext uri="{FF2B5EF4-FFF2-40B4-BE49-F238E27FC236}">
+                <a16:creationId xmlns:a16="http://schemas.microsoft.com/office/drawing/2014/main" id="{1B35FC32-BBD4-459E-BD5B-CD51DD1D3D2A}"/>
+              </a:ext>
+            </a:extLst>
+          </p:cNvPr>
           <p:cNvSpPr txBox="1"/>
           <p:nvPr/>
         </p:nvSpPr>
         <p:spPr>
           <a:xfrm>
-            <a:off x="2614320" y="2405153"/>
-            <a:ext cx="13311480" cy="3371179"/>
+            <a:off x="2026730" y="1077323"/>
+            <a:ext cx="14136881" cy="8132354"/>
           </a:xfrm>
           <a:prstGeom prst="rect">
             <a:avLst/>
@@ -5879,7 +5827,7 @@
           </a:bodyPr>
           <a:lstStyle/>
           <a:p>
-            <a:pPr algn="ctr">
+            <a:pPr>
               <a:lnSpc>
                 <a:spcPts val="5319"/>
               </a:lnSpc>
@@ -5897,7 +5845,29 @@
                 <a:cs typeface="Celandine"/>
                 <a:sym typeface="Celandine"/>
               </a:rPr>
-              <a:t>Kalam’s full name is </a:t>
+              <a:t>Kalam’s full name is ______.</a:t>
+            </a:r>
+          </a:p>
+          <a:p>
+            <a:pPr>
+              <a:lnSpc>
+                <a:spcPts val="5319"/>
+              </a:lnSpc>
+              <a:spcBef>
+                <a:spcPct val="0"/>
+              </a:spcBef>
+            </a:pPr>
+            <a:r>
+              <a:rPr lang="en-US" sz="3799" dirty="0">
+                <a:solidFill>
+                  <a:srgbClr val="FFDE59"/>
+                </a:solidFill>
+                <a:latin typeface="Celandine"/>
+                <a:ea typeface="Celandine"/>
+                <a:cs typeface="Celandine"/>
+                <a:sym typeface="Celandine"/>
+              </a:rPr>
+              <a:t>→ </a:t>
             </a:r>
             <a:r>
               <a:rPr lang="en-US" sz="3799" dirty="0" err="1">
@@ -5921,20 +5891,18 @@
                 <a:cs typeface="Celandine"/>
                 <a:sym typeface="Celandine"/>
               </a:rPr>
-              <a:t> Pakir </a:t>
-            </a:r>
-            <a:r>
-              <a:rPr lang="en-US" sz="3799" dirty="0" err="1">
-                <a:solidFill>
-                  <a:srgbClr val="FFDE59"/>
-                </a:solidFill>
-                <a:latin typeface="Celandine"/>
-                <a:ea typeface="Celandine"/>
-                <a:cs typeface="Celandine"/>
-                <a:sym typeface="Celandine"/>
-              </a:rPr>
-              <a:t>Jainulabdeen</a:t>
-            </a:r>
+              <a:t> Pakir Jainulabdeen Abdul Kalam</a:t>
+            </a:r>
+          </a:p>
+          <a:p>
+            <a:pPr>
+              <a:lnSpc>
+                <a:spcPts val="5319"/>
+              </a:lnSpc>
+              <a:spcBef>
+                <a:spcPct val="0"/>
+              </a:spcBef>
+            </a:pPr>
             <a:r>
               <a:rPr lang="en-US" sz="3799" dirty="0">
                 <a:solidFill>
@@ -5945,11 +5913,11 @@
                 <a:cs typeface="Celandine"/>
                 <a:sym typeface="Celandine"/>
               </a:rPr>
-              <a:t> Abdul Kalam.</a:t>
-            </a:r>
-          </a:p>
-          <a:p>
-            <a:pPr algn="ctr">
+              <a:t>He was the ______ President of India.</a:t>
+            </a:r>
+          </a:p>
+          <a:p>
+            <a:pPr>
               <a:lnSpc>
                 <a:spcPts val="5319"/>
               </a:lnSpc>
@@ -5967,11 +5935,32 @@
                 <a:cs typeface="Celandine"/>
                 <a:sym typeface="Celandine"/>
               </a:rPr>
-              <a:t>He was the 11th President of India.</a:t>
-            </a:r>
-          </a:p>
-          <a:p>
-            <a:pPr algn="ctr">
+              <a:t>→ 11</a:t>
+            </a:r>
+            <a:r>
+              <a:rPr lang="en-US" sz="3799" baseline="30000" dirty="0">
+                <a:solidFill>
+                  <a:srgbClr val="FFDE59"/>
+                </a:solidFill>
+                <a:latin typeface="Celandine"/>
+                <a:ea typeface="Celandine"/>
+                <a:cs typeface="Celandine"/>
+                <a:sym typeface="Celandine"/>
+              </a:rPr>
+              <a:t>th</a:t>
+            </a:r>
+            <a:endParaRPr lang="en-US" sz="3799" dirty="0">
+              <a:solidFill>
+                <a:srgbClr val="FFDE59"/>
+              </a:solidFill>
+              <a:latin typeface="Celandine"/>
+              <a:ea typeface="Celandine"/>
+              <a:cs typeface="Celandine"/>
+              <a:sym typeface="Celandine"/>
+            </a:endParaRPr>
+          </a:p>
+          <a:p>
+            <a:pPr>
               <a:lnSpc>
                 <a:spcPts val="5319"/>
               </a:lnSpc>
@@ -5989,11 +5978,11 @@
                 <a:cs typeface="Celandine"/>
                 <a:sym typeface="Celandine"/>
               </a:rPr>
-              <a:t>His birthday, October 15, is celebrated as World Students’ Day in India </a:t>
-            </a:r>
-          </a:p>
-          <a:p>
-            <a:pPr algn="ctr">
+              <a:t>His birthday, October 15, is celebrated as ______ in India.</a:t>
+            </a:r>
+          </a:p>
+          <a:p>
+            <a:pPr>
               <a:lnSpc>
                 <a:spcPts val="5319"/>
               </a:lnSpc>
@@ -6001,23 +5990,486 @@
                 <a:spcPct val="0"/>
               </a:spcBef>
             </a:pPr>
-            <a:endParaRPr lang="en-US" sz="3799" dirty="0">
-              <a:solidFill>
-                <a:srgbClr val="FFDE59"/>
-              </a:solidFill>
-              <a:latin typeface="Celandine"/>
-              <a:ea typeface="Celandine"/>
-              <a:cs typeface="Celandine"/>
-              <a:sym typeface="Celandine"/>
-            </a:endParaRPr>
+            <a:r>
+              <a:rPr lang="en-US" sz="3799" dirty="0">
+                <a:solidFill>
+                  <a:srgbClr val="FFDE59"/>
+                </a:solidFill>
+                <a:latin typeface="Celandine"/>
+                <a:ea typeface="Celandine"/>
+                <a:cs typeface="Celandine"/>
+                <a:sym typeface="Celandine"/>
+              </a:rPr>
+              <a:t>→ World Students’ Day</a:t>
+            </a:r>
+          </a:p>
+          <a:p>
+            <a:pPr>
+              <a:lnSpc>
+                <a:spcPts val="5319"/>
+              </a:lnSpc>
+              <a:spcBef>
+                <a:spcPct val="0"/>
+              </a:spcBef>
+            </a:pPr>
+            <a:r>
+              <a:rPr lang="en-US" sz="3799" dirty="0">
+                <a:solidFill>
+                  <a:srgbClr val="FFDE59"/>
+                </a:solidFill>
+                <a:latin typeface="Celandine"/>
+                <a:ea typeface="Celandine"/>
+                <a:cs typeface="Celandine"/>
+                <a:sym typeface="Celandine"/>
+              </a:rPr>
+              <a:t>Kalam joined ISRO in the year ______.</a:t>
+            </a:r>
+          </a:p>
+          <a:p>
+            <a:pPr>
+              <a:lnSpc>
+                <a:spcPts val="5319"/>
+              </a:lnSpc>
+              <a:spcBef>
+                <a:spcPct val="0"/>
+              </a:spcBef>
+            </a:pPr>
+            <a:r>
+              <a:rPr lang="en-US" sz="3799" dirty="0">
+                <a:solidFill>
+                  <a:srgbClr val="FFDE59"/>
+                </a:solidFill>
+                <a:latin typeface="Celandine"/>
+                <a:ea typeface="Celandine"/>
+                <a:cs typeface="Celandine"/>
+                <a:sym typeface="Celandine"/>
+              </a:rPr>
+              <a:t>→ 1969</a:t>
+            </a:r>
+          </a:p>
+          <a:p>
+            <a:pPr>
+              <a:lnSpc>
+                <a:spcPts val="5319"/>
+              </a:lnSpc>
+              <a:spcBef>
+                <a:spcPct val="0"/>
+              </a:spcBef>
+            </a:pPr>
+            <a:r>
+              <a:rPr lang="en-US" sz="3799" dirty="0">
+                <a:solidFill>
+                  <a:srgbClr val="FFDE59"/>
+                </a:solidFill>
+                <a:latin typeface="Celandine"/>
+                <a:ea typeface="Celandine"/>
+                <a:cs typeface="Celandine"/>
+                <a:sym typeface="Celandine"/>
+              </a:rPr>
+              <a:t>Kalam becomes President in which year?</a:t>
+            </a:r>
+          </a:p>
+          <a:p>
+            <a:pPr>
+              <a:lnSpc>
+                <a:spcPts val="5319"/>
+              </a:lnSpc>
+              <a:spcBef>
+                <a:spcPct val="0"/>
+              </a:spcBef>
+            </a:pPr>
+            <a:r>
+              <a:rPr lang="en-US" sz="3799" dirty="0">
+                <a:solidFill>
+                  <a:srgbClr val="FFDE59"/>
+                </a:solidFill>
+                <a:latin typeface="Celandine"/>
+                <a:ea typeface="Celandine"/>
+                <a:cs typeface="Celandine"/>
+                <a:sym typeface="Celandine"/>
+              </a:rPr>
+              <a:t>→ 2002</a:t>
+            </a:r>
+          </a:p>
+          <a:p>
+            <a:pPr>
+              <a:lnSpc>
+                <a:spcPts val="5319"/>
+              </a:lnSpc>
+              <a:spcBef>
+                <a:spcPct val="0"/>
+              </a:spcBef>
+            </a:pPr>
+            <a:r>
+              <a:rPr lang="en-US" sz="3799" dirty="0">
+                <a:solidFill>
+                  <a:srgbClr val="FFDE59"/>
+                </a:solidFill>
+                <a:latin typeface="Celandine"/>
+                <a:ea typeface="Celandine"/>
+                <a:cs typeface="Celandine"/>
+                <a:sym typeface="Celandine"/>
+              </a:rPr>
+              <a:t>India’s first satellite launch (SLV-3) </a:t>
+            </a:r>
+          </a:p>
+          <a:p>
+            <a:pPr>
+              <a:lnSpc>
+                <a:spcPts val="5319"/>
+              </a:lnSpc>
+              <a:spcBef>
+                <a:spcPct val="0"/>
+              </a:spcBef>
+            </a:pPr>
+            <a:r>
+              <a:rPr lang="en-US" sz="3799" dirty="0">
+                <a:solidFill>
+                  <a:srgbClr val="FFDE59"/>
+                </a:solidFill>
+                <a:latin typeface="Celandine"/>
+                <a:ea typeface="Celandine"/>
+                <a:cs typeface="Celandine"/>
+                <a:sym typeface="Celandine"/>
+              </a:rPr>
+              <a:t>→ 1980</a:t>
+            </a:r>
+          </a:p>
+        </p:txBody>
+      </p:sp>
+      <p:sp>
+        <p:nvSpPr>
+          <p:cNvPr id="8" name="Rectangle 7">
+            <a:extLst>
+              <a:ext uri="{FF2B5EF4-FFF2-40B4-BE49-F238E27FC236}">
+                <a16:creationId xmlns:a16="http://schemas.microsoft.com/office/drawing/2014/main" id="{04E86261-CF08-231F-40A4-16A5E4A32D98}"/>
+              </a:ext>
+            </a:extLst>
+          </p:cNvPr>
+          <p:cNvSpPr/>
+          <p:nvPr/>
+        </p:nvSpPr>
+        <p:spPr>
+          <a:xfrm>
+            <a:off x="19219248" y="1790700"/>
+            <a:ext cx="9379511" cy="533400"/>
+          </a:xfrm>
+          <a:prstGeom prst="rect">
+            <a:avLst/>
+          </a:prstGeom>
+          <a:solidFill>
+            <a:srgbClr val="6766E0"/>
+          </a:solidFill>
+          <a:ln>
+            <a:noFill/>
+          </a:ln>
+        </p:spPr>
+        <p:style>
+          <a:lnRef idx="2">
+            <a:schemeClr val="accent1">
+              <a:shade val="15000"/>
+            </a:schemeClr>
+          </a:lnRef>
+          <a:fillRef idx="1">
+            <a:schemeClr val="accent1"/>
+          </a:fillRef>
+          <a:effectRef idx="0">
+            <a:schemeClr val="accent1"/>
+          </a:effectRef>
+          <a:fontRef idx="minor">
+            <a:schemeClr val="lt1"/>
+          </a:fontRef>
+        </p:style>
+        <p:txBody>
+          <a:bodyPr rtlCol="0" anchor="ctr"/>
+          <a:lstStyle/>
+          <a:p>
+            <a:pPr algn="ctr"/>
+            <a:endParaRPr lang="en-US"/>
+          </a:p>
+        </p:txBody>
+      </p:sp>
+      <p:sp>
+        <p:nvSpPr>
+          <p:cNvPr id="9" name="Rectangle 8">
+            <a:extLst>
+              <a:ext uri="{FF2B5EF4-FFF2-40B4-BE49-F238E27FC236}">
+                <a16:creationId xmlns:a16="http://schemas.microsoft.com/office/drawing/2014/main" id="{F824A69B-276C-1A5F-AAA1-1E22CCE765FE}"/>
+              </a:ext>
+            </a:extLst>
+          </p:cNvPr>
+          <p:cNvSpPr/>
+          <p:nvPr/>
+        </p:nvSpPr>
+        <p:spPr>
+          <a:xfrm>
+            <a:off x="19271689" y="3162663"/>
+            <a:ext cx="9379511" cy="533400"/>
+          </a:xfrm>
+          <a:prstGeom prst="rect">
+            <a:avLst/>
+          </a:prstGeom>
+          <a:solidFill>
+            <a:srgbClr val="6766E0"/>
+          </a:solidFill>
+          <a:ln>
+            <a:noFill/>
+          </a:ln>
+        </p:spPr>
+        <p:style>
+          <a:lnRef idx="2">
+            <a:schemeClr val="accent1">
+              <a:shade val="15000"/>
+            </a:schemeClr>
+          </a:lnRef>
+          <a:fillRef idx="1">
+            <a:schemeClr val="accent1"/>
+          </a:fillRef>
+          <a:effectRef idx="0">
+            <a:schemeClr val="accent1"/>
+          </a:effectRef>
+          <a:fontRef idx="minor">
+            <a:schemeClr val="lt1"/>
+          </a:fontRef>
+        </p:style>
+        <p:txBody>
+          <a:bodyPr rtlCol="0" anchor="ctr"/>
+          <a:lstStyle/>
+          <a:p>
+            <a:pPr algn="ctr"/>
+            <a:endParaRPr lang="en-US"/>
+          </a:p>
+        </p:txBody>
+      </p:sp>
+      <p:sp>
+        <p:nvSpPr>
+          <p:cNvPr id="10" name="Rectangle 9">
+            <a:extLst>
+              <a:ext uri="{FF2B5EF4-FFF2-40B4-BE49-F238E27FC236}">
+                <a16:creationId xmlns:a16="http://schemas.microsoft.com/office/drawing/2014/main" id="{5F4FA768-BB4E-C33E-9AFA-9E67BC343872}"/>
+              </a:ext>
+            </a:extLst>
+          </p:cNvPr>
+          <p:cNvSpPr/>
+          <p:nvPr/>
+        </p:nvSpPr>
+        <p:spPr>
+          <a:xfrm>
+            <a:off x="19244475" y="4537769"/>
+            <a:ext cx="9379511" cy="533400"/>
+          </a:xfrm>
+          <a:prstGeom prst="rect">
+            <a:avLst/>
+          </a:prstGeom>
+          <a:solidFill>
+            <a:srgbClr val="6766E0"/>
+          </a:solidFill>
+          <a:ln>
+            <a:noFill/>
+          </a:ln>
+        </p:spPr>
+        <p:style>
+          <a:lnRef idx="2">
+            <a:schemeClr val="accent1">
+              <a:shade val="15000"/>
+            </a:schemeClr>
+          </a:lnRef>
+          <a:fillRef idx="1">
+            <a:schemeClr val="accent1"/>
+          </a:fillRef>
+          <a:effectRef idx="0">
+            <a:schemeClr val="accent1"/>
+          </a:effectRef>
+          <a:fontRef idx="minor">
+            <a:schemeClr val="lt1"/>
+          </a:fontRef>
+        </p:style>
+        <p:txBody>
+          <a:bodyPr rtlCol="0" anchor="ctr"/>
+          <a:lstStyle/>
+          <a:p>
+            <a:pPr algn="ctr"/>
+            <a:endParaRPr lang="en-US"/>
+          </a:p>
+        </p:txBody>
+      </p:sp>
+      <p:sp>
+        <p:nvSpPr>
+          <p:cNvPr id="11" name="Rectangle 10">
+            <a:extLst>
+              <a:ext uri="{FF2B5EF4-FFF2-40B4-BE49-F238E27FC236}">
+                <a16:creationId xmlns:a16="http://schemas.microsoft.com/office/drawing/2014/main" id="{2470F6ED-5EB1-C03E-5128-327E81A6E757}"/>
+              </a:ext>
+            </a:extLst>
+          </p:cNvPr>
+          <p:cNvSpPr/>
+          <p:nvPr/>
+        </p:nvSpPr>
+        <p:spPr>
+          <a:xfrm>
+            <a:off x="19219247" y="5772150"/>
+            <a:ext cx="9379511" cy="533400"/>
+          </a:xfrm>
+          <a:prstGeom prst="rect">
+            <a:avLst/>
+          </a:prstGeom>
+          <a:solidFill>
+            <a:srgbClr val="6766E0"/>
+          </a:solidFill>
+          <a:ln>
+            <a:noFill/>
+          </a:ln>
+        </p:spPr>
+        <p:style>
+          <a:lnRef idx="2">
+            <a:schemeClr val="accent1">
+              <a:shade val="15000"/>
+            </a:schemeClr>
+          </a:lnRef>
+          <a:fillRef idx="1">
+            <a:schemeClr val="accent1"/>
+          </a:fillRef>
+          <a:effectRef idx="0">
+            <a:schemeClr val="accent1"/>
+          </a:effectRef>
+          <a:fontRef idx="minor">
+            <a:schemeClr val="lt1"/>
+          </a:fontRef>
+        </p:style>
+        <p:txBody>
+          <a:bodyPr rtlCol="0" anchor="ctr"/>
+          <a:lstStyle/>
+          <a:p>
+            <a:pPr algn="ctr"/>
+            <a:endParaRPr lang="en-US"/>
+          </a:p>
+        </p:txBody>
+      </p:sp>
+      <p:sp>
+        <p:nvSpPr>
+          <p:cNvPr id="12" name="Rectangle 11">
+            <a:extLst>
+              <a:ext uri="{FF2B5EF4-FFF2-40B4-BE49-F238E27FC236}">
+                <a16:creationId xmlns:a16="http://schemas.microsoft.com/office/drawing/2014/main" id="{39F5A23A-3EE8-F08D-4483-8F3A91769D04}"/>
+              </a:ext>
+            </a:extLst>
+          </p:cNvPr>
+          <p:cNvSpPr/>
+          <p:nvPr/>
+        </p:nvSpPr>
+        <p:spPr>
+          <a:xfrm>
+            <a:off x="19222704" y="7284838"/>
+            <a:ext cx="9379511" cy="533400"/>
+          </a:xfrm>
+          <a:prstGeom prst="rect">
+            <a:avLst/>
+          </a:prstGeom>
+          <a:solidFill>
+            <a:srgbClr val="6766E0"/>
+          </a:solidFill>
+          <a:ln>
+            <a:noFill/>
+          </a:ln>
+        </p:spPr>
+        <p:style>
+          <a:lnRef idx="2">
+            <a:schemeClr val="accent1">
+              <a:shade val="15000"/>
+            </a:schemeClr>
+          </a:lnRef>
+          <a:fillRef idx="1">
+            <a:schemeClr val="accent1"/>
+          </a:fillRef>
+          <a:effectRef idx="0">
+            <a:schemeClr val="accent1"/>
+          </a:effectRef>
+          <a:fontRef idx="minor">
+            <a:schemeClr val="lt1"/>
+          </a:fontRef>
+        </p:style>
+        <p:txBody>
+          <a:bodyPr rtlCol="0" anchor="ctr"/>
+          <a:lstStyle/>
+          <a:p>
+            <a:pPr algn="ctr"/>
+            <a:endParaRPr lang="en-US"/>
+          </a:p>
+        </p:txBody>
+      </p:sp>
+      <p:sp>
+        <p:nvSpPr>
+          <p:cNvPr id="13" name="TextBox 12">
+            <a:extLst>
+              <a:ext uri="{FF2B5EF4-FFF2-40B4-BE49-F238E27FC236}">
+                <a16:creationId xmlns:a16="http://schemas.microsoft.com/office/drawing/2014/main" id="{0598AA92-9706-9F30-E318-86F2399BD778}"/>
+              </a:ext>
+            </a:extLst>
+          </p:cNvPr>
+          <p:cNvSpPr txBox="1"/>
+          <p:nvPr/>
+        </p:nvSpPr>
+        <p:spPr>
+          <a:xfrm>
+            <a:off x="6875062" y="98035"/>
+            <a:ext cx="4563836" cy="804964"/>
+          </a:xfrm>
+          <a:prstGeom prst="rect">
+            <a:avLst/>
+          </a:prstGeom>
+          <a:noFill/>
+        </p:spPr>
+        <p:txBody>
+          <a:bodyPr wrap="square">
+            <a:spAutoFit/>
+          </a:bodyPr>
+          <a:lstStyle/>
+          <a:p>
+            <a:pPr>
+              <a:lnSpc>
+                <a:spcPts val="5319"/>
+              </a:lnSpc>
+              <a:spcBef>
+                <a:spcPct val="0"/>
+              </a:spcBef>
+            </a:pPr>
+            <a:r>
+              <a:rPr lang="en-US" sz="5400" dirty="0">
+                <a:solidFill>
+                  <a:srgbClr val="FFDE59"/>
+                </a:solidFill>
+                <a:latin typeface="Celandine"/>
+                <a:ea typeface="Celandine"/>
+                <a:cs typeface="Celandine"/>
+                <a:sym typeface="Celandine"/>
+              </a:rPr>
+              <a:t>Questionnaire</a:t>
+            </a:r>
           </a:p>
         </p:txBody>
       </p:sp>
     </p:spTree>
+    <p:extLst>
+      <p:ext uri="{BB962C8B-B14F-4D97-AF65-F5344CB8AC3E}">
+        <p14:creationId xmlns:p14="http://schemas.microsoft.com/office/powerpoint/2010/main" val="3705612271"/>
+      </p:ext>
+    </p:extLst>
   </p:cSld>
   <p:clrMapOvr>
     <a:masterClrMapping/>
   </p:clrMapOvr>
+  <mc:AlternateContent xmlns:mc="http://schemas.openxmlformats.org/markup-compatibility/2006">
+    <mc:Choice xmlns:p159="http://schemas.microsoft.com/office/powerpoint/2015/09/main" Requires="p159">
+      <p:transition xmlns:p14="http://schemas.microsoft.com/office/powerpoint/2010/main" spd="slow" p14:dur="2000">
+        <p159:morph option="byObject"/>
+      </p:transition>
+    </mc:Choice>
+    <mc:Fallback>
+      <p:transition spd="slow">
+        <p:fade/>
+      </p:transition>
+    </mc:Fallback>
+  </mc:AlternateContent>
 </p:sld>
 </file>
 
@@ -8392,13 +8844,13 @@
   <p:clrMapOvr>
     <a:masterClrMapping/>
   </p:clrMapOvr>
-  <mc:AlternateContent xmlns:mc="http://schemas.openxmlformats.org/markup-compatibility/2006">
-    <mc:Choice xmlns:p159="http://schemas.microsoft.com/office/powerpoint/2015/09/main" Requires="p159">
+  <mc:AlternateContent xmlns:mc="http://schemas.openxmlformats.org/markup-compatibility/2006" xmlns:p159="http://schemas.microsoft.com/office/powerpoint/2015/09/main">
+    <mc:Choice Requires="p159">
       <p:transition xmlns:p14="http://schemas.microsoft.com/office/powerpoint/2010/main" spd="slow" p14:dur="2000">
         <p159:morph option="byObject"/>
       </p:transition>
     </mc:Choice>
-    <mc:Fallback>
+    <mc:Fallback xmlns="">
       <p:transition spd="slow">
         <p:fade/>
       </p:transition>
@@ -9148,13 +9600,13 @@
   <p:clrMapOvr>
     <a:masterClrMapping/>
   </p:clrMapOvr>
-  <mc:AlternateContent xmlns:mc="http://schemas.openxmlformats.org/markup-compatibility/2006">
-    <mc:Choice xmlns:p159="http://schemas.microsoft.com/office/powerpoint/2015/09/main" Requires="p159">
+  <mc:AlternateContent xmlns:mc="http://schemas.openxmlformats.org/markup-compatibility/2006" xmlns:p159="http://schemas.microsoft.com/office/powerpoint/2015/09/main">
+    <mc:Choice Requires="p159">
       <p:transition xmlns:p14="http://schemas.microsoft.com/office/powerpoint/2010/main" spd="slow" p14:dur="2000">
         <p159:morph option="byObject"/>
       </p:transition>
     </mc:Choice>
-    <mc:Fallback>
+    <mc:Fallback xmlns="">
       <p:transition spd="slow">
         <p:fade/>
       </p:transition>
@@ -9846,13 +10298,13 @@
   <p:clrMapOvr>
     <a:masterClrMapping/>
   </p:clrMapOvr>
-  <mc:AlternateContent xmlns:mc="http://schemas.openxmlformats.org/markup-compatibility/2006">
-    <mc:Choice xmlns:p159="http://schemas.microsoft.com/office/powerpoint/2015/09/main" Requires="p159">
+  <mc:AlternateContent xmlns:mc="http://schemas.openxmlformats.org/markup-compatibility/2006" xmlns:p159="http://schemas.microsoft.com/office/powerpoint/2015/09/main">
+    <mc:Choice Requires="p159">
       <p:transition xmlns:p14="http://schemas.microsoft.com/office/powerpoint/2010/main" spd="slow" p14:dur="2000">
         <p159:morph option="byObject"/>
       </p:transition>
     </mc:Choice>
-    <mc:Fallback>
+    <mc:Fallback xmlns="">
       <p:transition spd="slow">
         <p:fade/>
       </p:transition>
@@ -10490,13 +10942,13 @@
   <p:clrMapOvr>
     <a:masterClrMapping/>
   </p:clrMapOvr>
-  <mc:AlternateContent xmlns:mc="http://schemas.openxmlformats.org/markup-compatibility/2006">
-    <mc:Choice xmlns:p159="http://schemas.microsoft.com/office/powerpoint/2015/09/main" Requires="p159">
+  <mc:AlternateContent xmlns:mc="http://schemas.openxmlformats.org/markup-compatibility/2006" xmlns:p159="http://schemas.microsoft.com/office/powerpoint/2015/09/main">
+    <mc:Choice Requires="p159">
       <p:transition xmlns:p14="http://schemas.microsoft.com/office/powerpoint/2010/main" spd="slow" p14:dur="2000">
         <p159:morph option="byObject"/>
       </p:transition>
     </mc:Choice>
-    <mc:Fallback>
+    <mc:Fallback xmlns="">
       <p:transition spd="slow">
         <p:fade/>
       </p:transition>
@@ -10796,7 +11248,7 @@
                 </a:lnSpc>
               </a:pPr>
               <a:r>
-                <a:rPr lang="en-US" sz="2799">
+                <a:rPr lang="en-US" sz="2799" dirty="0">
                   <a:solidFill>
                     <a:srgbClr val="3231C3"/>
                   </a:solidFill>
@@ -10815,7 +11267,7 @@
                 </a:lnSpc>
               </a:pPr>
               <a:r>
-                <a:rPr lang="en-US" sz="2799">
+                <a:rPr lang="en-US" sz="2799" dirty="0">
                   <a:solidFill>
                     <a:srgbClr val="006B39"/>
                   </a:solidFill>
@@ -10834,7 +11286,7 @@
                 </a:lnSpc>
               </a:pPr>
               <a:r>
-                <a:rPr lang="en-US" sz="2799">
+                <a:rPr lang="en-US" sz="2799" dirty="0">
                   <a:solidFill>
                     <a:srgbClr val="8C52FF"/>
                   </a:solidFill>
@@ -10853,7 +11305,7 @@
                 </a:lnSpc>
               </a:pPr>
               <a:r>
-                <a:rPr lang="en-US" sz="2799">
+                <a:rPr lang="en-US" sz="2799" dirty="0">
                   <a:solidFill>
                     <a:srgbClr val="FF751F"/>
                   </a:solidFill>
@@ -10872,7 +11324,7 @@
                 </a:lnSpc>
               </a:pPr>
               <a:r>
-                <a:rPr lang="en-US" sz="2799">
+                <a:rPr lang="en-US" sz="2799" dirty="0">
                   <a:solidFill>
                     <a:srgbClr val="5CE1E6"/>
                   </a:solidFill>
@@ -10891,7 +11343,7 @@
                 </a:lnSpc>
               </a:pPr>
               <a:r>
-                <a:rPr lang="en-US" sz="2799">
+                <a:rPr lang="en-US" sz="2799" dirty="0">
                   <a:solidFill>
                     <a:srgbClr val="00BF63"/>
                   </a:solidFill>
@@ -10910,7 +11362,7 @@
                 </a:lnSpc>
               </a:pPr>
               <a:r>
-                <a:rPr lang="en-US" sz="2799">
+                <a:rPr lang="en-US" sz="2799" dirty="0">
                   <a:solidFill>
                     <a:srgbClr val="0097B2"/>
                   </a:solidFill>
@@ -10929,7 +11381,7 @@
                 </a:lnSpc>
               </a:pPr>
               <a:r>
-                <a:rPr lang="en-US" sz="2799">
+                <a:rPr lang="en-US" sz="2799" dirty="0">
                   <a:solidFill>
                     <a:srgbClr val="FFDE59"/>
                   </a:solidFill>
@@ -10948,7 +11400,7 @@
                 </a:lnSpc>
               </a:pPr>
               <a:r>
-                <a:rPr lang="en-US" sz="2799">
+                <a:rPr lang="en-US" sz="2799" dirty="0">
                   <a:solidFill>
                     <a:srgbClr val="CB6CE6"/>
                   </a:solidFill>
@@ -10969,7 +11421,7 @@
                   <a:spcPct val="0"/>
                 </a:spcBef>
               </a:pPr>
-              <a:endParaRPr lang="en-US" sz="2799">
+              <a:endParaRPr lang="en-US" sz="2799" dirty="0">
                 <a:solidFill>
                   <a:srgbClr val="CB6CE6"/>
                 </a:solidFill>
@@ -11331,7 +11783,7 @@
                 </a:spcBef>
               </a:pPr>
               <a:r>
-                <a:rPr lang="en-US" sz="2799">
+                <a:rPr lang="en-US" sz="2799" dirty="0">
                   <a:solidFill>
                     <a:srgbClr val="3231C3"/>
                   </a:solidFill>
@@ -11435,7 +11887,7 @@
                 </a:spcBef>
               </a:pPr>
               <a:r>
-                <a:rPr lang="en-US" sz="2799">
+                <a:rPr lang="en-US" sz="2799" dirty="0">
                   <a:solidFill>
                     <a:srgbClr val="3231C3"/>
                   </a:solidFill>
@@ -11538,7 +11990,7 @@
                 <a:buChar char="•"/>
               </a:pPr>
               <a:r>
-                <a:rPr lang="en-US" sz="2799">
+                <a:rPr lang="en-US" sz="2799" dirty="0">
                   <a:solidFill>
                     <a:srgbClr val="3231C3"/>
                   </a:solidFill>
@@ -11559,7 +12011,7 @@
                 <a:buChar char="•"/>
               </a:pPr>
               <a:r>
-                <a:rPr lang="en-US" sz="2799">
+                <a:rPr lang="en-US" sz="2799" dirty="0">
                   <a:solidFill>
                     <a:srgbClr val="3231C3"/>
                   </a:solidFill>
@@ -11583,7 +12035,7 @@
                 <a:buChar char="•"/>
               </a:pPr>
               <a:r>
-                <a:rPr lang="en-US" sz="2799">
+                <a:rPr lang="en-US" sz="2799" dirty="0">
                   <a:solidFill>
                     <a:srgbClr val="3231C3"/>
                   </a:solidFill>
@@ -12263,7 +12715,7 @@
                 </a:spcBef>
               </a:pPr>
               <a:r>
-                <a:rPr lang="en-US" sz="2799">
+                <a:rPr lang="en-US" sz="2799" dirty="0">
                   <a:solidFill>
                     <a:srgbClr val="3231C3"/>
                   </a:solidFill>
@@ -12364,7 +12816,7 @@
                 </a:lnSpc>
               </a:pPr>
               <a:r>
-                <a:rPr lang="en-US" sz="2399">
+                <a:rPr lang="en-US" sz="2399" dirty="0">
                   <a:solidFill>
                     <a:srgbClr val="3231C3"/>
                   </a:solidFill>
@@ -12373,7 +12825,31 @@
                   <a:cs typeface="Celandine"/>
                   <a:sym typeface="Celandine"/>
                 </a:rPr>
-                <a:t>Dr. Kalam spearheaded the Integrated Guided Missile Development Programme (IGMDP), leading to the development of:</a:t>
+                <a:t>Dr. Kalam spearheaded the Integrated Guided Missile Development </a:t>
+              </a:r>
+              <a:r>
+                <a:rPr lang="en-US" sz="2399" dirty="0" err="1">
+                  <a:solidFill>
+                    <a:srgbClr val="3231C3"/>
+                  </a:solidFill>
+                  <a:latin typeface="Celandine"/>
+                  <a:ea typeface="Celandine"/>
+                  <a:cs typeface="Celandine"/>
+                  <a:sym typeface="Celandine"/>
+                </a:rPr>
+                <a:t>Programme</a:t>
+              </a:r>
+              <a:r>
+                <a:rPr lang="en-US" sz="2399" dirty="0">
+                  <a:solidFill>
+                    <a:srgbClr val="3231C3"/>
+                  </a:solidFill>
+                  <a:latin typeface="Celandine"/>
+                  <a:ea typeface="Celandine"/>
+                  <a:cs typeface="Celandine"/>
+                  <a:sym typeface="Celandine"/>
+                </a:rPr>
+                <a:t> (IGMDP), leading to the development of:</a:t>
               </a:r>
             </a:p>
             <a:p>
@@ -12385,7 +12861,7 @@
                 <a:buChar char="•"/>
               </a:pPr>
               <a:r>
-                <a:rPr lang="en-US" sz="2399">
+                <a:rPr lang="en-US" sz="2399" dirty="0">
                   <a:solidFill>
                     <a:srgbClr val="3231C3"/>
                   </a:solidFill>
@@ -12406,7 +12882,7 @@
                 <a:buChar char="•"/>
               </a:pPr>
               <a:r>
-                <a:rPr lang="en-US" sz="2399">
+                <a:rPr lang="en-US" sz="2399" dirty="0">
                   <a:solidFill>
                     <a:srgbClr val="3231C3"/>
                   </a:solidFill>
@@ -12430,7 +12906,7 @@
                 <a:buChar char="•"/>
               </a:pPr>
               <a:r>
-                <a:rPr lang="en-US" sz="2399">
+                <a:rPr lang="en-US" sz="2399" dirty="0">
                   <a:solidFill>
                     <a:srgbClr val="3231C3"/>
                   </a:solidFill>
@@ -12533,7 +13009,7 @@
                 <a:buChar char="•"/>
               </a:pPr>
               <a:r>
-                <a:rPr lang="en-US" sz="2799">
+                <a:rPr lang="en-US" sz="2799" dirty="0">
                   <a:solidFill>
                     <a:srgbClr val="3231C3"/>
                   </a:solidFill>
@@ -12554,7 +13030,7 @@
                 <a:buChar char="•"/>
               </a:pPr>
               <a:r>
-                <a:rPr lang="en-US" sz="2799">
+                <a:rPr lang="en-US" sz="2799" dirty="0">
                   <a:solidFill>
                     <a:srgbClr val="3231C3"/>
                   </a:solidFill>
@@ -12578,7 +13054,7 @@
                 <a:buChar char="•"/>
               </a:pPr>
               <a:r>
-                <a:rPr lang="en-US" sz="2799">
+                <a:rPr lang="en-US" sz="2799" dirty="0">
                   <a:solidFill>
                     <a:srgbClr val="3231C3"/>
                   </a:solidFill>
@@ -13205,7 +13681,7 @@
                 </a:spcBef>
               </a:pPr>
               <a:r>
-                <a:rPr lang="en-US" sz="2799">
+                <a:rPr lang="en-US" sz="2799" dirty="0">
                   <a:solidFill>
                     <a:srgbClr val="3231C3"/>
                   </a:solidFill>
@@ -13306,7 +13782,7 @@
                 </a:lnSpc>
               </a:pPr>
               <a:r>
-                <a:rPr lang="en-US" sz="2399">
+                <a:rPr lang="en-US" sz="2399" dirty="0">
                   <a:solidFill>
                     <a:srgbClr val="3231C3"/>
                   </a:solidFill>
